--- a/content/youtube/shorts/SHORT_NEWS_03_anthropic_light_shade.pptx
+++ b/content/youtube/shorts/SHORT_NEWS_03_anthropic_light_shade.pptx
@@ -3088,7 +3088,7 @@
     <p:bg>
       <p:bgPr>
         <a:solidFill>
-          <a:srgbClr val="1C1917"/>
+          <a:srgbClr val="12100E"/>
         </a:solidFill>
         <a:effectLst/>
       </p:bgPr>
@@ -3102,20 +3102,22 @@
       <p:grpSpPr/>
       <p:sp>
         <p:nvSpPr>
-          <p:cNvPr id="2" name="Rectangle 1"/>
+          <p:cNvPr id="2" name="Rounded Rectangle 1"/>
           <p:cNvSpPr/>
           <p:nvPr/>
         </p:nvSpPr>
         <p:spPr>
           <a:xfrm>
-            <a:off x="0" y="0"/>
-            <a:ext cx="4114800" cy="54864"/>
-          </a:xfrm>
-          <a:prstGeom prst="rect">
-            <a:avLst/>
+            <a:off x="320040" y="457200"/>
+            <a:ext cx="1645920" cy="274320"/>
+          </a:xfrm>
+          <a:prstGeom prst="roundRect">
+            <a:avLst>
+              <a:gd name="adj" fmla="val 35000"/>
+            </a:avLst>
           </a:prstGeom>
           <a:solidFill>
-            <a:srgbClr val="B8942F"/>
+            <a:srgbClr val="E84D3D"/>
           </a:solidFill>
           <a:ln>
             <a:noFill/>
@@ -3136,10 +3138,19 @@
           </a:fontRef>
         </p:style>
         <p:txBody>
-          <a:bodyPr rtlCol="0" anchor="ctr"/>
+          <a:bodyPr rtlCol="0" anchor="ctr" wrap="none"/>
           <a:lstStyle/>
           <a:p>
             <a:pPr algn="ctr"/>
+            <a:r>
+              <a:rPr sz="1100" b="1">
+                <a:solidFill>
+                  <a:srgbClr val="F5F0EB"/>
+                </a:solidFill>
+                <a:latin typeface="Hiragino Sans"/>
+              </a:rPr>
+              <a:t>3月18日 Anthropic発表</a:t>
+            </a:r>
           </a:p>
         </p:txBody>
       </p:sp>
@@ -3151,8 +3162,8 @@
         </p:nvSpPr>
         <p:spPr>
           <a:xfrm>
-            <a:off x="274320" y="6675120"/>
-            <a:ext cx="3566160" cy="365760"/>
+            <a:off x="320040" y="1143000"/>
+            <a:ext cx="3474720" cy="139793"/>
           </a:xfrm>
           <a:prstGeom prst="rect">
             <a:avLst/>
@@ -3180,83 +3191,65 @@
           <a:bodyPr rtlCol="0" anchor="ctr" wrap="square"/>
           <a:lstStyle/>
           <a:p>
-            <a:pPr algn="l"/>
-            <a:r>
-              <a:rPr sz="900">
-                <a:solidFill>
-                  <a:srgbClr val="B8942F"/>
+            <a:pPr algn="l">
+              <a:lnSpc>
+                <a:spcPct val="130000"/>
+              </a:lnSpc>
+            </a:pPr>
+            <a:r>
+              <a:rPr sz="2800" b="1">
+                <a:solidFill>
+                  <a:srgbClr val="F5F0EB"/>
                 </a:solidFill>
                 <a:latin typeface="Hiragino Sans"/>
               </a:rPr>
-              <a:t>HARMONIC insight</a:t>
-            </a:r>
-          </a:p>
-        </p:txBody>
-      </p:sp>
-      <p:sp>
-        <p:nvSpPr>
-          <p:cNvPr id="4" name="Rounded Rectangle 3"/>
+              <a:t>AIを</a:t>
+            </a:r>
+          </a:p>
+          <a:p>
+            <a:pPr algn="l">
+              <a:lnSpc>
+                <a:spcPct val="130000"/>
+              </a:lnSpc>
+            </a:pPr>
+            <a:r>
+              <a:rPr sz="2800" b="1">
+                <a:solidFill>
+                  <a:srgbClr val="F5F0EB"/>
+                </a:solidFill>
+                <a:latin typeface="Hiragino Sans"/>
+              </a:rPr>
+              <a:t>一番使っている</a:t>
+            </a:r>
+          </a:p>
+          <a:p>
+            <a:pPr algn="l">
+              <a:lnSpc>
+                <a:spcPct val="130000"/>
+              </a:lnSpc>
+            </a:pPr>
+            <a:r>
+              <a:rPr sz="2800" b="1">
+                <a:solidFill>
+                  <a:srgbClr val="F5F0EB"/>
+                </a:solidFill>
+                <a:latin typeface="Hiragino Sans"/>
+              </a:rPr>
+              <a:t>人が、</a:t>
+            </a:r>
+          </a:p>
+        </p:txBody>
+      </p:sp>
+      <p:sp>
+        <p:nvSpPr>
+          <p:cNvPr id="4" name="Rectangle 3"/>
           <p:cNvSpPr/>
           <p:nvPr/>
         </p:nvSpPr>
         <p:spPr>
           <a:xfrm>
-            <a:off x="137160" y="274320"/>
-            <a:ext cx="1920240" cy="365760"/>
-          </a:xfrm>
-          <a:prstGeom prst="roundRect">
-            <a:avLst>
-              <a:gd name="adj" fmla="val 25000"/>
-            </a:avLst>
-          </a:prstGeom>
-          <a:solidFill>
-            <a:srgbClr val="E53935"/>
-          </a:solidFill>
-          <a:ln>
-            <a:noFill/>
-          </a:ln>
-        </p:spPr>
-        <p:style>
-          <a:lnRef idx="1">
-            <a:schemeClr val="accent1"/>
-          </a:lnRef>
-          <a:fillRef idx="3">
-            <a:schemeClr val="accent1"/>
-          </a:fillRef>
-          <a:effectRef idx="2">
-            <a:schemeClr val="accent1"/>
-          </a:effectRef>
-          <a:fontRef idx="minor">
-            <a:schemeClr val="lt1"/>
-          </a:fontRef>
-        </p:style>
-        <p:txBody>
-          <a:bodyPr rtlCol="0" anchor="ctr" wrap="none"/>
-          <a:lstStyle/>
-          <a:p>
-            <a:pPr algn="ctr"/>
-            <a:r>
-              <a:rPr sz="1200" b="1">
-                <a:solidFill>
-                  <a:srgbClr val="FFFFFF"/>
-                </a:solidFill>
-                <a:latin typeface="Hiragino Sans"/>
-              </a:rPr>
-              <a:t>3月18日 発表</a:t>
-            </a:r>
-          </a:p>
-        </p:txBody>
-      </p:sp>
-      <p:sp>
-        <p:nvSpPr>
-          <p:cNvPr id="5" name="Rectangle 4"/>
-          <p:cNvSpPr/>
-          <p:nvPr/>
-        </p:nvSpPr>
-        <p:spPr>
-          <a:xfrm>
-            <a:off x="2148840" y="274320"/>
-            <a:ext cx="1554480" cy="365760"/>
+            <a:off x="320040" y="2743200"/>
+            <a:ext cx="3474720" cy="99852"/>
           </a:xfrm>
           <a:prstGeom prst="rect">
             <a:avLst/>
@@ -3281,19 +3274,82 @@
           </a:fontRef>
         </p:style>
         <p:txBody>
-          <a:bodyPr rtlCol="0" anchor="ctr" wrap="none"/>
-          <a:lstStyle/>
-          <a:p>
-            <a:pPr algn="l"/>
-            <a:r>
-              <a:rPr sz="1100">
-                <a:solidFill>
-                  <a:srgbClr val="A8A29E"/>
+          <a:bodyPr rtlCol="0" anchor="ctr" wrap="square"/>
+          <a:lstStyle/>
+          <a:p>
+            <a:pPr algn="l">
+              <a:lnSpc>
+                <a:spcPct val="130000"/>
+              </a:lnSpc>
+            </a:pPr>
+            <a:r>
+              <a:rPr sz="3000" b="1">
+                <a:solidFill>
+                  <a:srgbClr val="E84D3D"/>
                 </a:solidFill>
                 <a:latin typeface="Hiragino Sans"/>
               </a:rPr>
-              <a:t>Anthropic</a:t>
-            </a:r>
+              <a:t>一番</a:t>
+            </a:r>
+          </a:p>
+          <a:p>
+            <a:pPr algn="l">
+              <a:lnSpc>
+                <a:spcPct val="130000"/>
+              </a:lnSpc>
+            </a:pPr>
+            <a:r>
+              <a:rPr sz="3000" b="1">
+                <a:solidFill>
+                  <a:srgbClr val="E84D3D"/>
+                </a:solidFill>
+                <a:latin typeface="Hiragino Sans"/>
+              </a:rPr>
+              <a:t>AIを恐れている。</a:t>
+            </a:r>
+          </a:p>
+        </p:txBody>
+      </p:sp>
+      <p:sp>
+        <p:nvSpPr>
+          <p:cNvPr id="5" name="Rectangle 4"/>
+          <p:cNvSpPr/>
+          <p:nvPr/>
+        </p:nvSpPr>
+        <p:spPr>
+          <a:xfrm>
+            <a:off x="320040" y="3886200"/>
+            <a:ext cx="914400" cy="13716"/>
+          </a:xfrm>
+          <a:prstGeom prst="rect">
+            <a:avLst/>
+          </a:prstGeom>
+          <a:solidFill>
+            <a:srgbClr val="C9A02D"/>
+          </a:solidFill>
+          <a:ln>
+            <a:noFill/>
+          </a:ln>
+        </p:spPr>
+        <p:style>
+          <a:lnRef idx="1">
+            <a:schemeClr val="accent1"/>
+          </a:lnRef>
+          <a:fillRef idx="3">
+            <a:schemeClr val="accent1"/>
+          </a:fillRef>
+          <a:effectRef idx="2">
+            <a:schemeClr val="accent1"/>
+          </a:effectRef>
+          <a:fontRef idx="minor">
+            <a:schemeClr val="lt1"/>
+          </a:fontRef>
+        </p:style>
+        <p:txBody>
+          <a:bodyPr rtlCol="0" anchor="ctr"/>
+          <a:lstStyle/>
+          <a:p>
+            <a:pPr algn="ctr"/>
           </a:p>
         </p:txBody>
       </p:sp>
@@ -3305,8 +3361,8 @@
         </p:nvSpPr>
         <p:spPr>
           <a:xfrm>
-            <a:off x="274320" y="1371600"/>
-            <a:ext cx="3566160" cy="1143000"/>
+            <a:off x="320040" y="4114800"/>
+            <a:ext cx="3474720" cy="39940"/>
           </a:xfrm>
           <a:prstGeom prst="rect">
             <a:avLst/>
@@ -3335,34 +3391,34 @@
           <a:lstStyle/>
           <a:p>
             <a:pPr algn="l">
-              <a:spcAft>
-                <a:spcPts val="400"/>
-              </a:spcAft>
+              <a:lnSpc>
+                <a:spcPct val="130000"/>
+              </a:lnSpc>
             </a:pPr>
             <a:r>
-              <a:rPr sz="2400" b="1">
-                <a:solidFill>
-                  <a:srgbClr val="FFFFFF"/>
+              <a:rPr sz="1200" b="0">
+                <a:solidFill>
+                  <a:srgbClr val="78716C"/>
                 </a:solidFill>
                 <a:latin typeface="Hiragino Sans"/>
               </a:rPr>
-              <a:t>AIを一番</a:t>
+              <a:t>81,000人のインタビューが</a:t>
             </a:r>
           </a:p>
           <a:p>
             <a:pPr algn="l">
-              <a:spcAft>
-                <a:spcPts val="400"/>
-              </a:spcAft>
+              <a:lnSpc>
+                <a:spcPct val="130000"/>
+              </a:lnSpc>
             </a:pPr>
             <a:r>
-              <a:rPr sz="2400" b="1">
-                <a:solidFill>
-                  <a:srgbClr val="FFFFFF"/>
+              <a:rPr sz="1200" b="0">
+                <a:solidFill>
+                  <a:srgbClr val="78716C"/>
                 </a:solidFill>
                 <a:latin typeface="Hiragino Sans"/>
               </a:rPr>
-              <a:t>使っている人が、</a:t>
+              <a:t>明らかにした「光と影」</a:t>
             </a:r>
           </a:p>
         </p:txBody>
@@ -3375,8 +3431,8 @@
         </p:nvSpPr>
         <p:spPr>
           <a:xfrm>
-            <a:off x="274320" y="2743200"/>
-            <a:ext cx="3566160" cy="1143000"/>
+            <a:off x="320040" y="6720000"/>
+            <a:ext cx="3474720" cy="14977"/>
           </a:xfrm>
           <a:prstGeom prst="rect">
             <a:avLst/>
@@ -3405,88 +3461,18 @@
           <a:lstStyle/>
           <a:p>
             <a:pPr algn="l">
-              <a:spcAft>
-                <a:spcPts val="400"/>
-              </a:spcAft>
+              <a:lnSpc>
+                <a:spcPct val="130000"/>
+              </a:lnSpc>
             </a:pPr>
             <a:r>
-              <a:rPr sz="2800" b="1">
-                <a:solidFill>
-                  <a:srgbClr val="E53935"/>
+              <a:rPr sz="900" b="0">
+                <a:solidFill>
+                  <a:srgbClr val="C9A02D"/>
                 </a:solidFill>
                 <a:latin typeface="Hiragino Sans"/>
               </a:rPr>
-              <a:t>一番AIを</a:t>
-            </a:r>
-          </a:p>
-          <a:p>
-            <a:pPr algn="l">
-              <a:spcAft>
-                <a:spcPts val="400"/>
-              </a:spcAft>
-            </a:pPr>
-            <a:r>
-              <a:rPr sz="2800" b="1">
-                <a:solidFill>
-                  <a:srgbClr val="E53935"/>
-                </a:solidFill>
-                <a:latin typeface="Hiragino Sans"/>
-              </a:rPr>
-              <a:t>恐れている</a:t>
-            </a:r>
-          </a:p>
-        </p:txBody>
-      </p:sp>
-      <p:sp>
-        <p:nvSpPr>
-          <p:cNvPr id="8" name="Rectangle 7"/>
-          <p:cNvSpPr/>
-          <p:nvPr/>
-        </p:nvSpPr>
-        <p:spPr>
-          <a:xfrm>
-            <a:off x="274320" y="4343400"/>
-            <a:ext cx="3566160" cy="457200"/>
-          </a:xfrm>
-          <a:prstGeom prst="rect">
-            <a:avLst/>
-          </a:prstGeom>
-          <a:noFill/>
-          <a:ln>
-            <a:noFill/>
-          </a:ln>
-        </p:spPr>
-        <p:style>
-          <a:lnRef idx="1">
-            <a:schemeClr val="accent1"/>
-          </a:lnRef>
-          <a:fillRef idx="3">
-            <a:schemeClr val="accent1"/>
-          </a:fillRef>
-          <a:effectRef idx="2">
-            <a:schemeClr val="accent1"/>
-          </a:effectRef>
-          <a:fontRef idx="minor">
-            <a:schemeClr val="lt1"/>
-          </a:fontRef>
-        </p:style>
-        <p:txBody>
-          <a:bodyPr rtlCol="0" anchor="ctr" wrap="square"/>
-          <a:lstStyle/>
-          <a:p>
-            <a:pPr algn="l">
-              <a:spcAft>
-                <a:spcPts val="400"/>
-              </a:spcAft>
-            </a:pPr>
-            <a:r>
-              <a:rPr sz="1300" b="0">
-                <a:solidFill>
-                  <a:srgbClr val="57534E"/>
-                </a:solidFill>
-                <a:latin typeface="Hiragino Sans"/>
-              </a:rPr>
-              <a:t>81,000人が語った「光と影」</a:t>
+              <a:t>HARMONIC insight</a:t>
             </a:r>
           </a:p>
         </p:txBody>
@@ -3505,7 +3491,7 @@
     <p:bg>
       <p:bgPr>
         <a:solidFill>
-          <a:srgbClr val="1C1917"/>
+          <a:srgbClr val="12100E"/>
         </a:solidFill>
         <a:effectLst/>
       </p:bgPr>
@@ -3525,51 +3511,8 @@
         </p:nvSpPr>
         <p:spPr>
           <a:xfrm>
-            <a:off x="0" y="0"/>
-            <a:ext cx="4114800" cy="54864"/>
-          </a:xfrm>
-          <a:prstGeom prst="rect">
-            <a:avLst/>
-          </a:prstGeom>
-          <a:solidFill>
-            <a:srgbClr val="B8942F"/>
-          </a:solidFill>
-          <a:ln>
-            <a:noFill/>
-          </a:ln>
-        </p:spPr>
-        <p:style>
-          <a:lnRef idx="1">
-            <a:schemeClr val="accent1"/>
-          </a:lnRef>
-          <a:fillRef idx="3">
-            <a:schemeClr val="accent1"/>
-          </a:fillRef>
-          <a:effectRef idx="2">
-            <a:schemeClr val="accent1"/>
-          </a:effectRef>
-          <a:fontRef idx="minor">
-            <a:schemeClr val="lt1"/>
-          </a:fontRef>
-        </p:style>
-        <p:txBody>
-          <a:bodyPr rtlCol="0" anchor="ctr"/>
-          <a:lstStyle/>
-          <a:p>
-            <a:pPr algn="ctr"/>
-          </a:p>
-        </p:txBody>
-      </p:sp>
-      <p:sp>
-        <p:nvSpPr>
-          <p:cNvPr id="3" name="Rectangle 2"/>
-          <p:cNvSpPr/>
-          <p:nvPr/>
-        </p:nvSpPr>
-        <p:spPr>
-          <a:xfrm>
-            <a:off x="274320" y="6675120"/>
-            <a:ext cx="3566160" cy="365760"/>
+            <a:off x="320040" y="548640"/>
+            <a:ext cx="3474720" cy="53254"/>
           </a:xfrm>
           <a:prstGeom prst="rect">
             <a:avLst/>
@@ -3597,37 +3540,55 @@
           <a:bodyPr rtlCol="0" anchor="ctr" wrap="square"/>
           <a:lstStyle/>
           <a:p>
-            <a:pPr algn="l"/>
-            <a:r>
-              <a:rPr sz="900">
-                <a:solidFill>
-                  <a:srgbClr val="B8942F"/>
+            <a:pPr algn="l">
+              <a:lnSpc>
+                <a:spcPct val="130000"/>
+              </a:lnSpc>
+            </a:pPr>
+            <a:r>
+              <a:rPr sz="1600" b="0">
+                <a:solidFill>
+                  <a:srgbClr val="78716C"/>
                 </a:solidFill>
                 <a:latin typeface="Hiragino Sans"/>
               </a:rPr>
-              <a:t>HARMONIC insight</a:t>
-            </a:r>
-          </a:p>
-        </p:txBody>
-      </p:sp>
-      <p:sp>
-        <p:nvSpPr>
-          <p:cNvPr id="4" name="Rounded Rectangle 3"/>
+              <a:t>レポートが示した</a:t>
+            </a:r>
+          </a:p>
+          <a:p>
+            <a:pPr algn="l">
+              <a:lnSpc>
+                <a:spcPct val="130000"/>
+              </a:lnSpc>
+            </a:pPr>
+            <a:r>
+              <a:rPr sz="1600" b="0">
+                <a:solidFill>
+                  <a:srgbClr val="78716C"/>
+                </a:solidFill>
+                <a:latin typeface="Hiragino Sans"/>
+              </a:rPr>
+              <a:t>矛盾するデータ</a:t>
+            </a:r>
+          </a:p>
+        </p:txBody>
+      </p:sp>
+      <p:sp>
+        <p:nvSpPr>
+          <p:cNvPr id="3" name="Rectangle 2"/>
           <p:cNvSpPr/>
           <p:nvPr/>
         </p:nvSpPr>
         <p:spPr>
           <a:xfrm>
-            <a:off x="137160" y="274320"/>
-            <a:ext cx="1920240" cy="365760"/>
-          </a:xfrm>
-          <a:prstGeom prst="roundRect">
-            <a:avLst>
-              <a:gd name="adj" fmla="val 25000"/>
-            </a:avLst>
+            <a:off x="320040" y="1143000"/>
+            <a:ext cx="914400" cy="13716"/>
+          </a:xfrm>
+          <a:prstGeom prst="rect">
+            <a:avLst/>
           </a:prstGeom>
           <a:solidFill>
-            <a:srgbClr val="E53935"/>
+            <a:srgbClr val="C9A02D"/>
           </a:solidFill>
           <a:ln>
             <a:noFill/>
@@ -3648,32 +3609,23 @@
           </a:fontRef>
         </p:style>
         <p:txBody>
-          <a:bodyPr rtlCol="0" anchor="ctr" wrap="none"/>
+          <a:bodyPr rtlCol="0" anchor="ctr"/>
           <a:lstStyle/>
           <a:p>
             <a:pPr algn="ctr"/>
-            <a:r>
-              <a:rPr sz="1200" b="1">
-                <a:solidFill>
-                  <a:srgbClr val="FFFFFF"/>
-                </a:solidFill>
-                <a:latin typeface="Hiragino Sans"/>
-              </a:rPr>
-              <a:t>3月18日 発表</a:t>
-            </a:r>
-          </a:p>
-        </p:txBody>
-      </p:sp>
-      <p:sp>
-        <p:nvSpPr>
-          <p:cNvPr id="5" name="Rectangle 4"/>
+          </a:p>
+        </p:txBody>
+      </p:sp>
+      <p:sp>
+        <p:nvSpPr>
+          <p:cNvPr id="4" name="Rectangle 3"/>
           <p:cNvSpPr/>
           <p:nvPr/>
         </p:nvSpPr>
         <p:spPr>
           <a:xfrm>
-            <a:off x="2148840" y="274320"/>
-            <a:ext cx="1554480" cy="365760"/>
+            <a:off x="320040" y="1371600"/>
+            <a:ext cx="3474720" cy="73225"/>
           </a:xfrm>
           <a:prstGeom prst="rect">
             <a:avLst/>
@@ -3698,32 +3650,52 @@
           </a:fontRef>
         </p:style>
         <p:txBody>
-          <a:bodyPr rtlCol="0" anchor="ctr" wrap="none"/>
-          <a:lstStyle/>
-          <a:p>
-            <a:pPr algn="l"/>
-            <a:r>
-              <a:rPr sz="1100">
-                <a:solidFill>
-                  <a:srgbClr val="A8A29E"/>
+          <a:bodyPr rtlCol="0" anchor="ctr" wrap="square"/>
+          <a:lstStyle/>
+          <a:p>
+            <a:pPr algn="l">
+              <a:lnSpc>
+                <a:spcPct val="130000"/>
+              </a:lnSpc>
+            </a:pPr>
+            <a:r>
+              <a:rPr sz="2200" b="1">
+                <a:solidFill>
+                  <a:srgbClr val="F5F0EB"/>
                 </a:solidFill>
                 <a:latin typeface="Hiragino Sans"/>
               </a:rPr>
-              <a:t>Anthropic</a:t>
-            </a:r>
-          </a:p>
-        </p:txBody>
-      </p:sp>
-      <p:sp>
-        <p:nvSpPr>
-          <p:cNvPr id="6" name="Rectangle 5"/>
+              <a:t>AIに感情的に</a:t>
+            </a:r>
+          </a:p>
+          <a:p>
+            <a:pPr algn="l">
+              <a:lnSpc>
+                <a:spcPct val="130000"/>
+              </a:lnSpc>
+            </a:pPr>
+            <a:r>
+              <a:rPr sz="2200" b="1">
+                <a:solidFill>
+                  <a:srgbClr val="F5F0EB"/>
+                </a:solidFill>
+                <a:latin typeface="Hiragino Sans"/>
+              </a:rPr>
+              <a:t>助けられた人ほど</a:t>
+            </a:r>
+          </a:p>
+        </p:txBody>
+      </p:sp>
+      <p:sp>
+        <p:nvSpPr>
+          <p:cNvPr id="5" name="Rectangle 4"/>
           <p:cNvSpPr/>
           <p:nvPr/>
         </p:nvSpPr>
         <p:spPr>
           <a:xfrm>
-            <a:off x="274320" y="1143000"/>
-            <a:ext cx="3566160" cy="914400"/>
+            <a:off x="320040" y="2286000"/>
+            <a:ext cx="3474720" cy="26627"/>
           </a:xfrm>
           <a:prstGeom prst="rect">
             <a:avLst/>
@@ -3752,48 +3724,32 @@
           <a:lstStyle/>
           <a:p>
             <a:pPr algn="l">
-              <a:spcAft>
-                <a:spcPts val="400"/>
-              </a:spcAft>
+              <a:lnSpc>
+                <a:spcPct val="130000"/>
+              </a:lnSpc>
             </a:pPr>
             <a:r>
-              <a:rPr sz="2000" b="1">
-                <a:solidFill>
-                  <a:srgbClr val="FFFFFF"/>
+              <a:rPr sz="1600" b="0">
+                <a:solidFill>
+                  <a:srgbClr val="78716C"/>
                 </a:solidFill>
                 <a:latin typeface="Hiragino Sans"/>
               </a:rPr>
-              <a:t>AIに感情的に</a:t>
-            </a:r>
-          </a:p>
-          <a:p>
-            <a:pPr algn="l">
-              <a:spcAft>
-                <a:spcPts val="400"/>
-              </a:spcAft>
-            </a:pPr>
-            <a:r>
-              <a:rPr sz="2000" b="1">
-                <a:solidFill>
-                  <a:srgbClr val="FFFFFF"/>
-                </a:solidFill>
-                <a:latin typeface="Hiragino Sans"/>
-              </a:rPr>
-              <a:t>助けられた人は</a:t>
-            </a:r>
-          </a:p>
-        </p:txBody>
-      </p:sp>
-      <p:sp>
-        <p:nvSpPr>
-          <p:cNvPr id="7" name="Rectangle 6"/>
+              <a:t>AI依存を恐れる率</a:t>
+            </a:r>
+          </a:p>
+        </p:txBody>
+      </p:sp>
+      <p:sp>
+        <p:nvSpPr>
+          <p:cNvPr id="6" name="Rectangle 5"/>
           <p:cNvSpPr/>
           <p:nvPr/>
         </p:nvSpPr>
         <p:spPr>
           <a:xfrm>
-            <a:off x="274320" y="2286000"/>
-            <a:ext cx="3566160" cy="548640"/>
+            <a:off x="320040" y="2743200"/>
+            <a:ext cx="3474720" cy="87782"/>
           </a:xfrm>
           <a:prstGeom prst="rect">
             <a:avLst/>
@@ -3818,23 +3774,71 @@
           </a:fontRef>
         </p:style>
         <p:txBody>
-          <a:bodyPr rtlCol="0" anchor="ctr" wrap="square"/>
-          <a:lstStyle/>
-          <a:p>
-            <a:pPr algn="ctr">
-              <a:spcAft>
-                <a:spcPts val="400"/>
-              </a:spcAft>
-            </a:pPr>
-            <a:r>
-              <a:rPr sz="1800" b="0">
-                <a:solidFill>
-                  <a:srgbClr val="A8A29E"/>
+          <a:bodyPr rtlCol="0" anchor="ctr" wrap="none"/>
+          <a:lstStyle/>
+          <a:p>
+            <a:pPr algn="l"/>
+            <a:r>
+              <a:rPr sz="6400" b="1">
+                <a:solidFill>
+                  <a:srgbClr val="E84D3D"/>
                 </a:solidFill>
                 <a:latin typeface="Hiragino Sans"/>
               </a:rPr>
-              <a:t>依存を恐れる率</a:t>
-            </a:r>
+              <a:t>3</a:t>
+            </a:r>
+            <a:r>
+              <a:rPr sz="2800" b="1">
+                <a:solidFill>
+                  <a:srgbClr val="E84D3D"/>
+                </a:solidFill>
+                <a:latin typeface="Hiragino Sans"/>
+              </a:rPr>
+              <a:t> 倍</a:t>
+            </a:r>
+          </a:p>
+        </p:txBody>
+      </p:sp>
+      <p:sp>
+        <p:nvSpPr>
+          <p:cNvPr id="7" name="Rectangle 6"/>
+          <p:cNvSpPr/>
+          <p:nvPr/>
+        </p:nvSpPr>
+        <p:spPr>
+          <a:xfrm>
+            <a:off x="320040" y="3886200"/>
+            <a:ext cx="914400" cy="13716"/>
+          </a:xfrm>
+          <a:prstGeom prst="rect">
+            <a:avLst/>
+          </a:prstGeom>
+          <a:solidFill>
+            <a:srgbClr val="C9A02D"/>
+          </a:solidFill>
+          <a:ln>
+            <a:noFill/>
+          </a:ln>
+        </p:spPr>
+        <p:style>
+          <a:lnRef idx="1">
+            <a:schemeClr val="accent1"/>
+          </a:lnRef>
+          <a:fillRef idx="3">
+            <a:schemeClr val="accent1"/>
+          </a:fillRef>
+          <a:effectRef idx="2">
+            <a:schemeClr val="accent1"/>
+          </a:effectRef>
+          <a:fontRef idx="minor">
+            <a:schemeClr val="lt1"/>
+          </a:fontRef>
+        </p:style>
+        <p:txBody>
+          <a:bodyPr rtlCol="0" anchor="ctr"/>
+          <a:lstStyle/>
+          <a:p>
+            <a:pPr algn="ctr"/>
           </a:p>
         </p:txBody>
       </p:sp>
@@ -3846,8 +3850,8 @@
         </p:nvSpPr>
         <p:spPr>
           <a:xfrm>
-            <a:off x="274320" y="2743200"/>
-            <a:ext cx="3566160" cy="640080"/>
+            <a:off x="320040" y="4114800"/>
+            <a:ext cx="3474720" cy="46597"/>
           </a:xfrm>
           <a:prstGeom prst="rect">
             <a:avLst/>
@@ -3872,27 +3876,38 @@
           </a:fontRef>
         </p:style>
         <p:txBody>
-          <a:bodyPr rtlCol="0" anchor="ctr" wrap="none"/>
-          <a:lstStyle/>
-          <a:p>
-            <a:pPr algn="ctr"/>
-            <a:r>
-              <a:rPr sz="5200" b="1">
-                <a:solidFill>
-                  <a:srgbClr val="E53935"/>
+          <a:bodyPr rtlCol="0" anchor="ctr" wrap="square"/>
+          <a:lstStyle/>
+          <a:p>
+            <a:pPr algn="l">
+              <a:lnSpc>
+                <a:spcPct val="130000"/>
+              </a:lnSpc>
+            </a:pPr>
+            <a:r>
+              <a:rPr sz="1400" b="0">
+                <a:solidFill>
+                  <a:srgbClr val="78716C"/>
                 </a:solidFill>
                 <a:latin typeface="Hiragino Sans"/>
               </a:rPr>
-              <a:t>3</a:t>
-            </a:r>
-            <a:r>
-              <a:rPr sz="2000" b="1">
-                <a:solidFill>
-                  <a:srgbClr val="E53935"/>
+              <a:t>教師が学生の思考力低下を</a:t>
+            </a:r>
+          </a:p>
+          <a:p>
+            <a:pPr algn="l">
+              <a:lnSpc>
+                <a:spcPct val="130000"/>
+              </a:lnSpc>
+            </a:pPr>
+            <a:r>
+              <a:rPr sz="1400" b="0">
+                <a:solidFill>
+                  <a:srgbClr val="78716C"/>
                 </a:solidFill>
                 <a:latin typeface="Hiragino Sans"/>
               </a:rPr>
-              <a:t>倍</a:t>
+              <a:t>目撃する頻度</a:t>
             </a:r>
           </a:p>
         </p:txBody>
@@ -3905,51 +3920,8 @@
         </p:nvSpPr>
         <p:spPr>
           <a:xfrm>
-            <a:off x="274320" y="3886200"/>
-            <a:ext cx="3566160" cy="18288"/>
-          </a:xfrm>
-          <a:prstGeom prst="rect">
-            <a:avLst/>
-          </a:prstGeom>
-          <a:solidFill>
-            <a:srgbClr val="B8942F"/>
-          </a:solidFill>
-          <a:ln>
-            <a:noFill/>
-          </a:ln>
-        </p:spPr>
-        <p:style>
-          <a:lnRef idx="1">
-            <a:schemeClr val="accent1"/>
-          </a:lnRef>
-          <a:fillRef idx="3">
-            <a:schemeClr val="accent1"/>
-          </a:fillRef>
-          <a:effectRef idx="2">
-            <a:schemeClr val="accent1"/>
-          </a:effectRef>
-          <a:fontRef idx="minor">
-            <a:schemeClr val="lt1"/>
-          </a:fontRef>
-        </p:style>
-        <p:txBody>
-          <a:bodyPr rtlCol="0" anchor="ctr"/>
-          <a:lstStyle/>
-          <a:p>
-            <a:pPr algn="ctr"/>
-          </a:p>
-        </p:txBody>
-      </p:sp>
-      <p:sp>
-        <p:nvSpPr>
-          <p:cNvPr id="10" name="Rectangle 9"/>
-          <p:cNvSpPr/>
-          <p:nvPr/>
-        </p:nvSpPr>
-        <p:spPr>
-          <a:xfrm>
-            <a:off x="274320" y="4114800"/>
-            <a:ext cx="3566160" cy="731520"/>
+            <a:off x="320040" y="4800600"/>
+            <a:ext cx="3474720" cy="65836"/>
           </a:xfrm>
           <a:prstGeom prst="rect">
             <a:avLst/>
@@ -3974,52 +3946,41 @@
           </a:fontRef>
         </p:style>
         <p:txBody>
-          <a:bodyPr rtlCol="0" anchor="ctr" wrap="square"/>
-          <a:lstStyle/>
-          <a:p>
-            <a:pPr algn="l">
-              <a:spcAft>
-                <a:spcPts val="400"/>
-              </a:spcAft>
-            </a:pPr>
-            <a:r>
-              <a:rPr sz="1400" b="0">
-                <a:solidFill>
-                  <a:srgbClr val="A8A29E"/>
+          <a:bodyPr rtlCol="0" anchor="ctr" wrap="none"/>
+          <a:lstStyle/>
+          <a:p>
+            <a:pPr algn="l"/>
+            <a:r>
+              <a:rPr sz="4800" b="1">
+                <a:solidFill>
+                  <a:srgbClr val="FFB300"/>
                 </a:solidFill>
                 <a:latin typeface="Hiragino Sans"/>
               </a:rPr>
-              <a:t>教師が学生の思考力低下を</a:t>
-            </a:r>
-          </a:p>
-          <a:p>
-            <a:pPr algn="l">
-              <a:spcAft>
-                <a:spcPts val="400"/>
-              </a:spcAft>
-            </a:pPr>
-            <a:r>
-              <a:rPr sz="1400" b="0">
-                <a:solidFill>
-                  <a:srgbClr val="A8A29E"/>
+              <a:t>2.5</a:t>
+            </a:r>
+            <a:r>
+              <a:rPr sz="2400" b="1">
+                <a:solidFill>
+                  <a:srgbClr val="FFB300"/>
                 </a:solidFill>
                 <a:latin typeface="Hiragino Sans"/>
               </a:rPr>
-              <a:t>目撃する率</a:t>
-            </a:r>
-          </a:p>
-        </p:txBody>
-      </p:sp>
-      <p:sp>
-        <p:nvSpPr>
-          <p:cNvPr id="11" name="Rectangle 10"/>
+              <a:t> 倍</a:t>
+            </a:r>
+          </a:p>
+        </p:txBody>
+      </p:sp>
+      <p:sp>
+        <p:nvSpPr>
+          <p:cNvPr id="10" name="Rectangle 9"/>
           <p:cNvSpPr/>
           <p:nvPr/>
         </p:nvSpPr>
         <p:spPr>
           <a:xfrm>
-            <a:off x="274320" y="4800600"/>
-            <a:ext cx="3566160" cy="548640"/>
+            <a:off x="320040" y="6400000"/>
+            <a:ext cx="3474720" cy="13313"/>
           </a:xfrm>
           <a:prstGeom prst="rect">
             <a:avLst/>
@@ -4048,18 +4009,72 @@
           <a:lstStyle/>
           <a:p>
             <a:pPr algn="l">
-              <a:spcAft>
-                <a:spcPts val="400"/>
-              </a:spcAft>
+              <a:lnSpc>
+                <a:spcPct val="130000"/>
+              </a:lnSpc>
             </a:pPr>
             <a:r>
-              <a:rPr sz="2400" b="1">
-                <a:solidFill>
-                  <a:srgbClr val="FFA726"/>
+              <a:rPr sz="800" b="0">
+                <a:solidFill>
+                  <a:srgbClr val="4A4540"/>
                 </a:solidFill>
                 <a:latin typeface="Hiragino Sans"/>
               </a:rPr>
-              <a:t>平均の2.5倍</a:t>
+              <a:t>出典: Anthropic "What 81,000 people want from AI"</a:t>
+            </a:r>
+          </a:p>
+        </p:txBody>
+      </p:sp>
+      <p:sp>
+        <p:nvSpPr>
+          <p:cNvPr id="11" name="Rectangle 10"/>
+          <p:cNvSpPr/>
+          <p:nvPr/>
+        </p:nvSpPr>
+        <p:spPr>
+          <a:xfrm>
+            <a:off x="320040" y="6720000"/>
+            <a:ext cx="3474720" cy="14977"/>
+          </a:xfrm>
+          <a:prstGeom prst="rect">
+            <a:avLst/>
+          </a:prstGeom>
+          <a:noFill/>
+          <a:ln>
+            <a:noFill/>
+          </a:ln>
+        </p:spPr>
+        <p:style>
+          <a:lnRef idx="1">
+            <a:schemeClr val="accent1"/>
+          </a:lnRef>
+          <a:fillRef idx="3">
+            <a:schemeClr val="accent1"/>
+          </a:fillRef>
+          <a:effectRef idx="2">
+            <a:schemeClr val="accent1"/>
+          </a:effectRef>
+          <a:fontRef idx="minor">
+            <a:schemeClr val="lt1"/>
+          </a:fontRef>
+        </p:style>
+        <p:txBody>
+          <a:bodyPr rtlCol="0" anchor="ctr" wrap="square"/>
+          <a:lstStyle/>
+          <a:p>
+            <a:pPr algn="l">
+              <a:lnSpc>
+                <a:spcPct val="130000"/>
+              </a:lnSpc>
+            </a:pPr>
+            <a:r>
+              <a:rPr sz="900" b="0">
+                <a:solidFill>
+                  <a:srgbClr val="C9A02D"/>
+                </a:solidFill>
+                <a:latin typeface="Hiragino Sans"/>
+              </a:rPr>
+              <a:t>HARMONIC insight</a:t>
             </a:r>
           </a:p>
         </p:txBody>
@@ -4078,7 +4093,7 @@
     <p:bg>
       <p:bgPr>
         <a:solidFill>
-          <a:srgbClr val="1C1917"/>
+          <a:srgbClr val="12100E"/>
         </a:solidFill>
         <a:effectLst/>
       </p:bgPr>
@@ -4098,14 +4113,14 @@
         </p:nvSpPr>
         <p:spPr>
           <a:xfrm>
-            <a:off x="0" y="0"/>
-            <a:ext cx="4114800" cy="54864"/>
+            <a:off x="0" y="914400"/>
+            <a:ext cx="36576" cy="3657600"/>
           </a:xfrm>
           <a:prstGeom prst="rect">
             <a:avLst/>
           </a:prstGeom>
           <a:solidFill>
-            <a:srgbClr val="B8942F"/>
+            <a:srgbClr val="C9A02D"/>
           </a:solidFill>
           <a:ln>
             <a:noFill/>
@@ -4141,8 +4156,8 @@
         </p:nvSpPr>
         <p:spPr>
           <a:xfrm>
-            <a:off x="274320" y="6675120"/>
-            <a:ext cx="3566160" cy="365760"/>
+            <a:off x="320040" y="914400"/>
+            <a:ext cx="3474720" cy="46597"/>
           </a:xfrm>
           <a:prstGeom prst="rect">
             <a:avLst/>
@@ -4170,15 +4185,35 @@
           <a:bodyPr rtlCol="0" anchor="ctr" wrap="square"/>
           <a:lstStyle/>
           <a:p>
-            <a:pPr algn="l"/>
-            <a:r>
-              <a:rPr sz="900">
-                <a:solidFill>
-                  <a:srgbClr val="B8942F"/>
+            <a:pPr algn="l">
+              <a:lnSpc>
+                <a:spcPct val="130000"/>
+              </a:lnSpc>
+            </a:pPr>
+            <a:r>
+              <a:rPr sz="1400" b="0">
+                <a:solidFill>
+                  <a:srgbClr val="78716C"/>
                 </a:solidFill>
                 <a:latin typeface="Hiragino Sans"/>
               </a:rPr>
-              <a:t>HARMONIC insight</a:t>
+              <a:t>レポートに登場する</a:t>
+            </a:r>
+          </a:p>
+          <a:p>
+            <a:pPr algn="l">
+              <a:lnSpc>
+                <a:spcPct val="130000"/>
+              </a:lnSpc>
+            </a:pPr>
+            <a:r>
+              <a:rPr sz="1400" b="0">
+                <a:solidFill>
+                  <a:srgbClr val="78716C"/>
+                </a:solidFill>
+                <a:latin typeface="Hiragino Sans"/>
+              </a:rPr>
+              <a:t>イスラエルの弁護士</a:t>
             </a:r>
           </a:p>
         </p:txBody>
@@ -4191,51 +4226,8 @@
         </p:nvSpPr>
         <p:spPr>
           <a:xfrm>
-            <a:off x="137160" y="1371600"/>
-            <a:ext cx="36576" cy="2057400"/>
-          </a:xfrm>
-          <a:prstGeom prst="rect">
-            <a:avLst/>
-          </a:prstGeom>
-          <a:solidFill>
-            <a:srgbClr val="B8942F"/>
-          </a:solidFill>
-          <a:ln>
-            <a:noFill/>
-          </a:ln>
-        </p:spPr>
-        <p:style>
-          <a:lnRef idx="1">
-            <a:schemeClr val="accent1"/>
-          </a:lnRef>
-          <a:fillRef idx="3">
-            <a:schemeClr val="accent1"/>
-          </a:fillRef>
-          <a:effectRef idx="2">
-            <a:schemeClr val="accent1"/>
-          </a:effectRef>
-          <a:fontRef idx="minor">
-            <a:schemeClr val="lt1"/>
-          </a:fontRef>
-        </p:style>
-        <p:txBody>
-          <a:bodyPr rtlCol="0" anchor="ctr"/>
-          <a:lstStyle/>
-          <a:p>
-            <a:pPr algn="ctr"/>
-          </a:p>
-        </p:txBody>
-      </p:sp>
-      <p:sp>
-        <p:nvSpPr>
-          <p:cNvPr id="5" name="Rectangle 4"/>
-          <p:cNvSpPr/>
-          <p:nvPr/>
-        </p:nvSpPr>
-        <p:spPr>
-          <a:xfrm>
-            <a:off x="274320" y="1371600"/>
-            <a:ext cx="3566160" cy="1143000"/>
+            <a:off x="320040" y="1600200"/>
+            <a:ext cx="3474720" cy="157715"/>
           </a:xfrm>
           <a:prstGeom prst="rect">
             <a:avLst/>
@@ -4264,48 +4256,80 @@
           <a:lstStyle/>
           <a:p>
             <a:pPr algn="l">
-              <a:spcAft>
-                <a:spcPts val="400"/>
-              </a:spcAft>
+              <a:lnSpc>
+                <a:spcPct val="140000"/>
+              </a:lnSpc>
             </a:pPr>
             <a:r>
-              <a:rPr sz="1800" b="1">
-                <a:solidFill>
-                  <a:srgbClr val="FFFFFF"/>
+              <a:rPr sz="2200" b="1">
+                <a:solidFill>
+                  <a:srgbClr val="F5F0EB"/>
                 </a:solidFill>
                 <a:latin typeface="Hiragino Sans"/>
               </a:rPr>
-              <a:t>AIで契約書レビューの</a:t>
+              <a:t>「AIで</a:t>
             </a:r>
           </a:p>
           <a:p>
             <a:pPr algn="l">
-              <a:spcAft>
-                <a:spcPts val="400"/>
-              </a:spcAft>
+              <a:lnSpc>
+                <a:spcPct val="140000"/>
+              </a:lnSpc>
             </a:pPr>
             <a:r>
-              <a:rPr sz="1800" b="1">
-                <a:solidFill>
-                  <a:srgbClr val="FFFFFF"/>
+              <a:rPr sz="2200" b="1">
+                <a:solidFill>
+                  <a:srgbClr val="F5F0EB"/>
                 </a:solidFill>
                 <a:latin typeface="Hiragino Sans"/>
               </a:rPr>
-              <a:t>時間を節約している。</a:t>
-            </a:r>
-          </a:p>
-        </p:txBody>
-      </p:sp>
-      <p:sp>
-        <p:nvSpPr>
-          <p:cNvPr id="6" name="Rectangle 5"/>
+              <a:t>  契約書レビューの</a:t>
+            </a:r>
+          </a:p>
+          <a:p>
+            <a:pPr algn="l">
+              <a:lnSpc>
+                <a:spcPct val="140000"/>
+              </a:lnSpc>
+            </a:pPr>
+            <a:r>
+              <a:rPr sz="2200" b="1">
+                <a:solidFill>
+                  <a:srgbClr val="F5F0EB"/>
+                </a:solidFill>
+                <a:latin typeface="Hiragino Sans"/>
+              </a:rPr>
+              <a:t>  時間を節約</a:t>
+            </a:r>
+          </a:p>
+          <a:p>
+            <a:pPr algn="l">
+              <a:lnSpc>
+                <a:spcPct val="140000"/>
+              </a:lnSpc>
+            </a:pPr>
+            <a:r>
+              <a:rPr sz="2200" b="1">
+                <a:solidFill>
+                  <a:srgbClr val="F5F0EB"/>
+                </a:solidFill>
+                <a:latin typeface="Hiragino Sans"/>
+              </a:rPr>
+              <a:t>  している。</a:t>
+            </a:r>
+          </a:p>
+        </p:txBody>
+      </p:sp>
+      <p:sp>
+        <p:nvSpPr>
+          <p:cNvPr id="5" name="Rectangle 4"/>
           <p:cNvSpPr/>
           <p:nvPr/>
         </p:nvSpPr>
         <p:spPr>
           <a:xfrm>
-            <a:off x="274320" y="2514600"/>
-            <a:ext cx="3566160" cy="1371600"/>
+            <a:off x="320040" y="3200400"/>
+            <a:ext cx="3474720" cy="197144"/>
           </a:xfrm>
           <a:prstGeom prst="rect">
             <a:avLst/>
@@ -4334,80 +4358,96 @@
           <a:lstStyle/>
           <a:p>
             <a:pPr algn="l">
-              <a:spcAft>
-                <a:spcPts val="400"/>
-              </a:spcAft>
+              <a:lnSpc>
+                <a:spcPct val="140000"/>
+              </a:lnSpc>
             </a:pPr>
             <a:r>
-              <a:rPr sz="1800" b="1">
-                <a:solidFill>
-                  <a:srgbClr val="FFA726"/>
+              <a:rPr sz="2200" b="1">
+                <a:solidFill>
+                  <a:srgbClr val="FFB300"/>
                 </a:solidFill>
                 <a:latin typeface="Hiragino Sans"/>
               </a:rPr>
-              <a:t>でも同時に恐れている。</a:t>
+              <a:t>  でも同時に</a:t>
             </a:r>
           </a:p>
           <a:p>
             <a:pPr algn="l">
-              <a:spcAft>
-                <a:spcPts val="400"/>
-              </a:spcAft>
+              <a:lnSpc>
+                <a:spcPct val="140000"/>
+              </a:lnSpc>
             </a:pPr>
             <a:r>
-              <a:rPr sz="1800" b="1">
-                <a:solidFill>
-                  <a:srgbClr val="FFA726"/>
+              <a:rPr sz="2200" b="1">
+                <a:solidFill>
+                  <a:srgbClr val="FFB300"/>
                 </a:solidFill>
                 <a:latin typeface="Hiragino Sans"/>
               </a:rPr>
-              <a:t>自分で読む力を</a:t>
+              <a:t>  恐れている。</a:t>
             </a:r>
           </a:p>
           <a:p>
             <a:pPr algn="l">
-              <a:spcAft>
-                <a:spcPts val="400"/>
-              </a:spcAft>
+              <a:lnSpc>
+                <a:spcPct val="140000"/>
+              </a:lnSpc>
             </a:pPr>
             <a:r>
-              <a:rPr sz="1800" b="1">
-                <a:solidFill>
-                  <a:srgbClr val="FFA726"/>
+              <a:rPr sz="2200" b="1">
+                <a:solidFill>
+                  <a:srgbClr val="FFB300"/>
                 </a:solidFill>
                 <a:latin typeface="Hiragino Sans"/>
               </a:rPr>
-              <a:t>失っているのでは</a:t>
+              <a:t>  自分で読む力を</a:t>
             </a:r>
           </a:p>
           <a:p>
             <a:pPr algn="l">
-              <a:spcAft>
-                <a:spcPts val="400"/>
-              </a:spcAft>
+              <a:lnSpc>
+                <a:spcPct val="140000"/>
+              </a:lnSpc>
             </a:pPr>
             <a:r>
-              <a:rPr sz="1800" b="1">
-                <a:solidFill>
-                  <a:srgbClr val="FFA726"/>
+              <a:rPr sz="2200" b="1">
+                <a:solidFill>
+                  <a:srgbClr val="FFB300"/>
                 </a:solidFill>
                 <a:latin typeface="Hiragino Sans"/>
               </a:rPr>
-              <a:t>ないか。</a:t>
-            </a:r>
-          </a:p>
-        </p:txBody>
-      </p:sp>
-      <p:sp>
-        <p:nvSpPr>
-          <p:cNvPr id="7" name="Rectangle 6"/>
+              <a:t>  失っているの</a:t>
+            </a:r>
+          </a:p>
+          <a:p>
+            <a:pPr algn="l">
+              <a:lnSpc>
+                <a:spcPct val="140000"/>
+              </a:lnSpc>
+            </a:pPr>
+            <a:r>
+              <a:rPr sz="2200" b="1">
+                <a:solidFill>
+                  <a:srgbClr val="FFB300"/>
+                </a:solidFill>
+                <a:latin typeface="Hiragino Sans"/>
+              </a:rPr>
+              <a:t>  ではないか」</a:t>
+            </a:r>
+          </a:p>
+        </p:txBody>
+      </p:sp>
+      <p:sp>
+        <p:nvSpPr>
+          <p:cNvPr id="6" name="Rectangle 5"/>
           <p:cNvSpPr/>
           <p:nvPr/>
         </p:nvSpPr>
         <p:spPr>
           <a:xfrm>
-            <a:off x="274320" y="4114800"/>
-            <a:ext cx="3566160" cy="365760"/>
+            <a:off x="320040" y="5486400"/>
+            <a:ext cx="3474720" cy="18306"/>
           </a:xfrm>
           <a:prstGeom prst="rect">
             <a:avLst/>
@@ -4436,18 +4476,72 @@
           <a:lstStyle/>
           <a:p>
             <a:pPr algn="l">
-              <a:spcAft>
-                <a:spcPts val="400"/>
-              </a:spcAft>
+              <a:lnSpc>
+                <a:spcPct val="130000"/>
+              </a:lnSpc>
             </a:pPr>
             <a:r>
-              <a:rPr sz="1200" b="0">
-                <a:solidFill>
-                  <a:srgbClr val="57534E"/>
+              <a:rPr sz="1100" b="0">
+                <a:solidFill>
+                  <a:srgbClr val="4A4540"/>
                 </a:solidFill>
                 <a:latin typeface="Hiragino Sans"/>
               </a:rPr>
-              <a:t>── イスラエルの弁護士</a:t>
+              <a:t>── 実名で語られた、リアルな声</a:t>
+            </a:r>
+          </a:p>
+        </p:txBody>
+      </p:sp>
+      <p:sp>
+        <p:nvSpPr>
+          <p:cNvPr id="7" name="Rectangle 6"/>
+          <p:cNvSpPr/>
+          <p:nvPr/>
+        </p:nvSpPr>
+        <p:spPr>
+          <a:xfrm>
+            <a:off x="320040" y="6720000"/>
+            <a:ext cx="3474720" cy="14977"/>
+          </a:xfrm>
+          <a:prstGeom prst="rect">
+            <a:avLst/>
+          </a:prstGeom>
+          <a:noFill/>
+          <a:ln>
+            <a:noFill/>
+          </a:ln>
+        </p:spPr>
+        <p:style>
+          <a:lnRef idx="1">
+            <a:schemeClr val="accent1"/>
+          </a:lnRef>
+          <a:fillRef idx="3">
+            <a:schemeClr val="accent1"/>
+          </a:fillRef>
+          <a:effectRef idx="2">
+            <a:schemeClr val="accent1"/>
+          </a:effectRef>
+          <a:fontRef idx="minor">
+            <a:schemeClr val="lt1"/>
+          </a:fontRef>
+        </p:style>
+        <p:txBody>
+          <a:bodyPr rtlCol="0" anchor="ctr" wrap="square"/>
+          <a:lstStyle/>
+          <a:p>
+            <a:pPr algn="l">
+              <a:lnSpc>
+                <a:spcPct val="130000"/>
+              </a:lnSpc>
+            </a:pPr>
+            <a:r>
+              <a:rPr sz="900" b="0">
+                <a:solidFill>
+                  <a:srgbClr val="C9A02D"/>
+                </a:solidFill>
+                <a:latin typeface="Hiragino Sans"/>
+              </a:rPr>
+              <a:t>HARMONIC insight</a:t>
             </a:r>
           </a:p>
         </p:txBody>
@@ -4466,7 +4560,7 @@
     <p:bg>
       <p:bgPr>
         <a:solidFill>
-          <a:srgbClr val="1C1917"/>
+          <a:srgbClr val="12100E"/>
         </a:solidFill>
         <a:effectLst/>
       </p:bgPr>
@@ -4486,51 +4580,8 @@
         </p:nvSpPr>
         <p:spPr>
           <a:xfrm>
-            <a:off x="0" y="0"/>
-            <a:ext cx="4114800" cy="54864"/>
-          </a:xfrm>
-          <a:prstGeom prst="rect">
-            <a:avLst/>
-          </a:prstGeom>
-          <a:solidFill>
-            <a:srgbClr val="B8942F"/>
-          </a:solidFill>
-          <a:ln>
-            <a:noFill/>
-          </a:ln>
-        </p:spPr>
-        <p:style>
-          <a:lnRef idx="1">
-            <a:schemeClr val="accent1"/>
-          </a:lnRef>
-          <a:fillRef idx="3">
-            <a:schemeClr val="accent1"/>
-          </a:fillRef>
-          <a:effectRef idx="2">
-            <a:schemeClr val="accent1"/>
-          </a:effectRef>
-          <a:fontRef idx="minor">
-            <a:schemeClr val="lt1"/>
-          </a:fontRef>
-        </p:style>
-        <p:txBody>
-          <a:bodyPr rtlCol="0" anchor="ctr"/>
-          <a:lstStyle/>
-          <a:p>
-            <a:pPr algn="ctr"/>
-          </a:p>
-        </p:txBody>
-      </p:sp>
-      <p:sp>
-        <p:nvSpPr>
-          <p:cNvPr id="3" name="Rectangle 2"/>
-          <p:cNvSpPr/>
-          <p:nvPr/>
-        </p:nvSpPr>
-        <p:spPr>
-          <a:xfrm>
-            <a:off x="274320" y="6675120"/>
-            <a:ext cx="3566160" cy="365760"/>
+            <a:off x="320040" y="548640"/>
+            <a:ext cx="3474720" cy="59911"/>
           </a:xfrm>
           <a:prstGeom prst="rect">
             <a:avLst/>
@@ -4558,16 +4609,79 @@
           <a:bodyPr rtlCol="0" anchor="ctr" wrap="square"/>
           <a:lstStyle/>
           <a:p>
-            <a:pPr algn="l"/>
-            <a:r>
-              <a:rPr sz="900">
-                <a:solidFill>
-                  <a:srgbClr val="B8942F"/>
+            <a:pPr algn="l">
+              <a:lnSpc>
+                <a:spcPct val="130000"/>
+              </a:lnSpc>
+            </a:pPr>
+            <a:r>
+              <a:rPr sz="1800" b="0">
+                <a:solidFill>
+                  <a:srgbClr val="78716C"/>
                 </a:solidFill>
                 <a:latin typeface="Hiragino Sans"/>
               </a:rPr>
-              <a:t>HARMONIC insight</a:t>
-            </a:r>
+              <a:t>調査が明らかにした</a:t>
+            </a:r>
+          </a:p>
+          <a:p>
+            <a:pPr algn="l">
+              <a:lnSpc>
+                <a:spcPct val="130000"/>
+              </a:lnSpc>
+            </a:pPr>
+            <a:r>
+              <a:rPr sz="1800" b="0">
+                <a:solidFill>
+                  <a:srgbClr val="78716C"/>
+                </a:solidFill>
+                <a:latin typeface="Hiragino Sans"/>
+              </a:rPr>
+              <a:t>3つの懸念</a:t>
+            </a:r>
+          </a:p>
+        </p:txBody>
+      </p:sp>
+      <p:sp>
+        <p:nvSpPr>
+          <p:cNvPr id="3" name="Rectangle 2"/>
+          <p:cNvSpPr/>
+          <p:nvPr/>
+        </p:nvSpPr>
+        <p:spPr>
+          <a:xfrm>
+            <a:off x="320040" y="1143000"/>
+            <a:ext cx="914400" cy="13716"/>
+          </a:xfrm>
+          <a:prstGeom prst="rect">
+            <a:avLst/>
+          </a:prstGeom>
+          <a:solidFill>
+            <a:srgbClr val="C9A02D"/>
+          </a:solidFill>
+          <a:ln>
+            <a:noFill/>
+          </a:ln>
+        </p:spPr>
+        <p:style>
+          <a:lnRef idx="1">
+            <a:schemeClr val="accent1"/>
+          </a:lnRef>
+          <a:fillRef idx="3">
+            <a:schemeClr val="accent1"/>
+          </a:fillRef>
+          <a:effectRef idx="2">
+            <a:schemeClr val="accent1"/>
+          </a:effectRef>
+          <a:fontRef idx="minor">
+            <a:schemeClr val="lt1"/>
+          </a:fontRef>
+        </p:style>
+        <p:txBody>
+          <a:bodyPr rtlCol="0" anchor="ctr"/>
+          <a:lstStyle/>
+          <a:p>
+            <a:pPr algn="ctr"/>
           </a:p>
         </p:txBody>
       </p:sp>
@@ -4579,8 +4693,8 @@
         </p:nvSpPr>
         <p:spPr>
           <a:xfrm>
-            <a:off x="274320" y="822960"/>
-            <a:ext cx="3566160" cy="548640"/>
+            <a:off x="320040" y="1371600"/>
+            <a:ext cx="3474720" cy="53254"/>
           </a:xfrm>
           <a:prstGeom prst="rect">
             <a:avLst/>
@@ -4609,18 +4723,18 @@
           <a:lstStyle/>
           <a:p>
             <a:pPr algn="l">
-              <a:spcAft>
-                <a:spcPts val="400"/>
-              </a:spcAft>
+              <a:lnSpc>
+                <a:spcPct val="130000"/>
+              </a:lnSpc>
             </a:pPr>
             <a:r>
-              <a:rPr sz="2200" b="1">
-                <a:solidFill>
-                  <a:srgbClr val="B8942F"/>
+              <a:rPr sz="3200" b="1">
+                <a:solidFill>
+                  <a:srgbClr val="E84D3D"/>
                 </a:solidFill>
                 <a:latin typeface="Hiragino Sans"/>
               </a:rPr>
-              <a:t>懸念トップ3</a:t>
+              <a:t>27%</a:t>
             </a:r>
           </a:p>
         </p:txBody>
@@ -4633,8 +4747,8 @@
         </p:nvSpPr>
         <p:spPr>
           <a:xfrm>
-            <a:off x="274320" y="1600200"/>
-            <a:ext cx="3566160" cy="228600"/>
+            <a:off x="320040" y="1791600"/>
+            <a:ext cx="3474720" cy="21634"/>
           </a:xfrm>
           <a:prstGeom prst="rect">
             <a:avLst/>
@@ -4659,122 +4773,36 @@
           </a:fontRef>
         </p:style>
         <p:txBody>
-          <a:bodyPr rtlCol="0" anchor="ctr"/>
-          <a:lstStyle/>
-          <a:p>
-            <a:pPr algn="l"/>
-            <a:r>
-              <a:rPr sz="1100">
-                <a:solidFill>
-                  <a:srgbClr val="A8A29E"/>
+          <a:bodyPr rtlCol="0" anchor="ctr" wrap="square"/>
+          <a:lstStyle/>
+          <a:p>
+            <a:pPr algn="l">
+              <a:lnSpc>
+                <a:spcPct val="130000"/>
+              </a:lnSpc>
+            </a:pPr>
+            <a:r>
+              <a:rPr sz="1300" b="0">
+                <a:solidFill>
+                  <a:srgbClr val="78716C"/>
                 </a:solidFill>
                 <a:latin typeface="Hiragino Sans"/>
               </a:rPr>
-              <a:t>1. 信頼性（ハルシネーション）</a:t>
-            </a:r>
-          </a:p>
-        </p:txBody>
-      </p:sp>
-      <p:sp>
-        <p:nvSpPr>
-          <p:cNvPr id="6" name="Rounded Rectangle 5"/>
+              <a:t>AIの信頼性（ハルシネーション）</a:t>
+            </a:r>
+          </a:p>
+        </p:txBody>
+      </p:sp>
+      <p:sp>
+        <p:nvSpPr>
+          <p:cNvPr id="6" name="Rectangle 5"/>
           <p:cNvSpPr/>
           <p:nvPr/>
         </p:nvSpPr>
         <p:spPr>
           <a:xfrm>
-            <a:off x="274320" y="1828800"/>
-            <a:ext cx="3031236" cy="320040"/>
-          </a:xfrm>
-          <a:prstGeom prst="roundRect">
-            <a:avLst>
-              <a:gd name="adj" fmla="val 15000"/>
-            </a:avLst>
-          </a:prstGeom>
-          <a:solidFill>
-            <a:srgbClr val="2C2723"/>
-          </a:solidFill>
-          <a:ln>
-            <a:noFill/>
-          </a:ln>
-        </p:spPr>
-        <p:style>
-          <a:lnRef idx="1">
-            <a:schemeClr val="accent1"/>
-          </a:lnRef>
-          <a:fillRef idx="3">
-            <a:schemeClr val="accent1"/>
-          </a:fillRef>
-          <a:effectRef idx="2">
-            <a:schemeClr val="accent1"/>
-          </a:effectRef>
-          <a:fontRef idx="minor">
-            <a:schemeClr val="lt1"/>
-          </a:fontRef>
-        </p:style>
-        <p:txBody>
-          <a:bodyPr rtlCol="0" anchor="ctr"/>
-          <a:lstStyle/>
-          <a:p>
-            <a:pPr algn="ctr"/>
-          </a:p>
-        </p:txBody>
-      </p:sp>
-      <p:sp>
-        <p:nvSpPr>
-          <p:cNvPr id="7" name="Rounded Rectangle 6"/>
-          <p:cNvSpPr/>
-          <p:nvPr/>
-        </p:nvSpPr>
-        <p:spPr>
-          <a:xfrm>
-            <a:off x="274320" y="1828800"/>
-            <a:ext cx="2312400" cy="320040"/>
-          </a:xfrm>
-          <a:prstGeom prst="roundRect">
-            <a:avLst>
-              <a:gd name="adj" fmla="val 15000"/>
-            </a:avLst>
-          </a:prstGeom>
-          <a:solidFill>
-            <a:srgbClr val="E53935"/>
-          </a:solidFill>
-          <a:ln>
-            <a:noFill/>
-          </a:ln>
-        </p:spPr>
-        <p:style>
-          <a:lnRef idx="1">
-            <a:schemeClr val="accent1"/>
-          </a:lnRef>
-          <a:fillRef idx="3">
-            <a:schemeClr val="accent1"/>
-          </a:fillRef>
-          <a:effectRef idx="2">
-            <a:schemeClr val="accent1"/>
-          </a:effectRef>
-          <a:fontRef idx="minor">
-            <a:schemeClr val="lt1"/>
-          </a:fontRef>
-        </p:style>
-        <p:txBody>
-          <a:bodyPr rtlCol="0" anchor="ctr"/>
-          <a:lstStyle/>
-          <a:p>
-            <a:pPr algn="ctr"/>
-          </a:p>
-        </p:txBody>
-      </p:sp>
-      <p:sp>
-        <p:nvSpPr>
-          <p:cNvPr id="8" name="Rectangle 7"/>
-          <p:cNvSpPr/>
-          <p:nvPr/>
-        </p:nvSpPr>
-        <p:spPr>
-          <a:xfrm>
-            <a:off x="3374136" y="1828800"/>
-            <a:ext cx="548640" cy="320040"/>
+            <a:off x="320040" y="2286000"/>
+            <a:ext cx="3474720" cy="53254"/>
           </a:xfrm>
           <a:prstGeom prst="rect">
             <a:avLst/>
@@ -4799,32 +4827,36 @@
           </a:fontRef>
         </p:style>
         <p:txBody>
-          <a:bodyPr rtlCol="0" anchor="ctr"/>
-          <a:lstStyle/>
-          <a:p>
-            <a:pPr algn="l"/>
-            <a:r>
-              <a:rPr sz="1300" b="1">
-                <a:solidFill>
-                  <a:srgbClr val="E53935"/>
+          <a:bodyPr rtlCol="0" anchor="ctr" wrap="square"/>
+          <a:lstStyle/>
+          <a:p>
+            <a:pPr algn="l">
+              <a:lnSpc>
+                <a:spcPct val="130000"/>
+              </a:lnSpc>
+            </a:pPr>
+            <a:r>
+              <a:rPr sz="3200" b="1">
+                <a:solidFill>
+                  <a:srgbClr val="FFB300"/>
                 </a:solidFill>
                 <a:latin typeface="Hiragino Sans"/>
               </a:rPr>
-              <a:t>26.7%</a:t>
-            </a:r>
-          </a:p>
-        </p:txBody>
-      </p:sp>
-      <p:sp>
-        <p:nvSpPr>
-          <p:cNvPr id="9" name="Rectangle 8"/>
+              <a:t>22%</a:t>
+            </a:r>
+          </a:p>
+        </p:txBody>
+      </p:sp>
+      <p:sp>
+        <p:nvSpPr>
+          <p:cNvPr id="7" name="Rectangle 6"/>
           <p:cNvSpPr/>
           <p:nvPr/>
         </p:nvSpPr>
         <p:spPr>
           <a:xfrm>
-            <a:off x="274320" y="2286000"/>
-            <a:ext cx="3566160" cy="228600"/>
+            <a:off x="320040" y="2706000"/>
+            <a:ext cx="3474720" cy="21634"/>
           </a:xfrm>
           <a:prstGeom prst="rect">
             <a:avLst/>
@@ -4849,122 +4881,36 @@
           </a:fontRef>
         </p:style>
         <p:txBody>
-          <a:bodyPr rtlCol="0" anchor="ctr"/>
-          <a:lstStyle/>
-          <a:p>
-            <a:pPr algn="l"/>
-            <a:r>
-              <a:rPr sz="1100">
-                <a:solidFill>
-                  <a:srgbClr val="A8A29E"/>
+          <a:bodyPr rtlCol="0" anchor="ctr" wrap="square"/>
+          <a:lstStyle/>
+          <a:p>
+            <a:pPr algn="l">
+              <a:lnSpc>
+                <a:spcPct val="130000"/>
+              </a:lnSpc>
+            </a:pPr>
+            <a:r>
+              <a:rPr sz="1300" b="0">
+                <a:solidFill>
+                  <a:srgbClr val="78716C"/>
                 </a:solidFill>
                 <a:latin typeface="Hiragino Sans"/>
               </a:rPr>
-              <a:t>2. 雇用と経済への影響</a:t>
-            </a:r>
-          </a:p>
-        </p:txBody>
-      </p:sp>
-      <p:sp>
-        <p:nvSpPr>
-          <p:cNvPr id="10" name="Rounded Rectangle 9"/>
+              <a:t>雇用と経済への影響</a:t>
+            </a:r>
+          </a:p>
+        </p:txBody>
+      </p:sp>
+      <p:sp>
+        <p:nvSpPr>
+          <p:cNvPr id="8" name="Rectangle 7"/>
           <p:cNvSpPr/>
           <p:nvPr/>
         </p:nvSpPr>
         <p:spPr>
           <a:xfrm>
-            <a:off x="274320" y="2514600"/>
-            <a:ext cx="3031236" cy="320040"/>
-          </a:xfrm>
-          <a:prstGeom prst="roundRect">
-            <a:avLst>
-              <a:gd name="adj" fmla="val 15000"/>
-            </a:avLst>
-          </a:prstGeom>
-          <a:solidFill>
-            <a:srgbClr val="2C2723"/>
-          </a:solidFill>
-          <a:ln>
-            <a:noFill/>
-          </a:ln>
-        </p:spPr>
-        <p:style>
-          <a:lnRef idx="1">
-            <a:schemeClr val="accent1"/>
-          </a:lnRef>
-          <a:fillRef idx="3">
-            <a:schemeClr val="accent1"/>
-          </a:fillRef>
-          <a:effectRef idx="2">
-            <a:schemeClr val="accent1"/>
-          </a:effectRef>
-          <a:fontRef idx="minor">
-            <a:schemeClr val="lt1"/>
-          </a:fontRef>
-        </p:style>
-        <p:txBody>
-          <a:bodyPr rtlCol="0" anchor="ctr"/>
-          <a:lstStyle/>
-          <a:p>
-            <a:pPr algn="ctr"/>
-          </a:p>
-        </p:txBody>
-      </p:sp>
-      <p:sp>
-        <p:nvSpPr>
-          <p:cNvPr id="11" name="Rounded Rectangle 10"/>
-          <p:cNvSpPr/>
-          <p:nvPr/>
-        </p:nvSpPr>
-        <p:spPr>
-          <a:xfrm>
-            <a:off x="274320" y="2514600"/>
-            <a:ext cx="1931330" cy="320040"/>
-          </a:xfrm>
-          <a:prstGeom prst="roundRect">
-            <a:avLst>
-              <a:gd name="adj" fmla="val 15000"/>
-            </a:avLst>
-          </a:prstGeom>
-          <a:solidFill>
-            <a:srgbClr val="FFA726"/>
-          </a:solidFill>
-          <a:ln>
-            <a:noFill/>
-          </a:ln>
-        </p:spPr>
-        <p:style>
-          <a:lnRef idx="1">
-            <a:schemeClr val="accent1"/>
-          </a:lnRef>
-          <a:fillRef idx="3">
-            <a:schemeClr val="accent1"/>
-          </a:fillRef>
-          <a:effectRef idx="2">
-            <a:schemeClr val="accent1"/>
-          </a:effectRef>
-          <a:fontRef idx="minor">
-            <a:schemeClr val="lt1"/>
-          </a:fontRef>
-        </p:style>
-        <p:txBody>
-          <a:bodyPr rtlCol="0" anchor="ctr"/>
-          <a:lstStyle/>
-          <a:p>
-            <a:pPr algn="ctr"/>
-          </a:p>
-        </p:txBody>
-      </p:sp>
-      <p:sp>
-        <p:nvSpPr>
-          <p:cNvPr id="12" name="Rectangle 11"/>
-          <p:cNvSpPr/>
-          <p:nvPr/>
-        </p:nvSpPr>
-        <p:spPr>
-          <a:xfrm>
-            <a:off x="3374136" y="2514600"/>
-            <a:ext cx="548640" cy="320040"/>
+            <a:off x="320040" y="3200400"/>
+            <a:ext cx="3474720" cy="53254"/>
           </a:xfrm>
           <a:prstGeom prst="rect">
             <a:avLst/>
@@ -4989,32 +4935,36 @@
           </a:fontRef>
         </p:style>
         <p:txBody>
-          <a:bodyPr rtlCol="0" anchor="ctr"/>
-          <a:lstStyle/>
-          <a:p>
-            <a:pPr algn="l"/>
-            <a:r>
-              <a:rPr sz="1300" b="1">
-                <a:solidFill>
-                  <a:srgbClr val="FFA726"/>
+          <a:bodyPr rtlCol="0" anchor="ctr" wrap="square"/>
+          <a:lstStyle/>
+          <a:p>
+            <a:pPr algn="l">
+              <a:lnSpc>
+                <a:spcPct val="130000"/>
+              </a:lnSpc>
+            </a:pPr>
+            <a:r>
+              <a:rPr sz="3200" b="1">
+                <a:solidFill>
+                  <a:srgbClr val="BB86FC"/>
                 </a:solidFill>
                 <a:latin typeface="Hiragino Sans"/>
               </a:rPr>
-              <a:t>22.3%</a:t>
-            </a:r>
-          </a:p>
-        </p:txBody>
-      </p:sp>
-      <p:sp>
-        <p:nvSpPr>
-          <p:cNvPr id="13" name="Rectangle 12"/>
+              <a:t>22%</a:t>
+            </a:r>
+          </a:p>
+        </p:txBody>
+      </p:sp>
+      <p:sp>
+        <p:nvSpPr>
+          <p:cNvPr id="9" name="Rectangle 8"/>
           <p:cNvSpPr/>
           <p:nvPr/>
         </p:nvSpPr>
         <p:spPr>
           <a:xfrm>
-            <a:off x="274320" y="2971800"/>
-            <a:ext cx="3566160" cy="228600"/>
+            <a:off x="320040" y="3620400"/>
+            <a:ext cx="3474720" cy="21634"/>
           </a:xfrm>
           <a:prstGeom prst="rect">
             <a:avLst/>
@@ -5039,40 +4989,42 @@
           </a:fontRef>
         </p:style>
         <p:txBody>
-          <a:bodyPr rtlCol="0" anchor="ctr"/>
-          <a:lstStyle/>
-          <a:p>
-            <a:pPr algn="l"/>
-            <a:r>
-              <a:rPr sz="1100">
-                <a:solidFill>
-                  <a:srgbClr val="A8A29E"/>
+          <a:bodyPr rtlCol="0" anchor="ctr" wrap="square"/>
+          <a:lstStyle/>
+          <a:p>
+            <a:pPr algn="l">
+              <a:lnSpc>
+                <a:spcPct val="130000"/>
+              </a:lnSpc>
+            </a:pPr>
+            <a:r>
+              <a:rPr sz="1300" b="0">
+                <a:solidFill>
+                  <a:srgbClr val="78716C"/>
                 </a:solidFill>
                 <a:latin typeface="Hiragino Sans"/>
               </a:rPr>
-              <a:t>3. 人間の自律性の喪失</a:t>
-            </a:r>
-          </a:p>
-        </p:txBody>
-      </p:sp>
-      <p:sp>
-        <p:nvSpPr>
-          <p:cNvPr id="14" name="Rounded Rectangle 13"/>
+              <a:t>人間の自律性の喪失</a:t>
+            </a:r>
+          </a:p>
+        </p:txBody>
+      </p:sp>
+      <p:sp>
+        <p:nvSpPr>
+          <p:cNvPr id="10" name="Rectangle 9"/>
           <p:cNvSpPr/>
           <p:nvPr/>
         </p:nvSpPr>
         <p:spPr>
           <a:xfrm>
-            <a:off x="274320" y="3200400"/>
-            <a:ext cx="3031236" cy="320040"/>
-          </a:xfrm>
-          <a:prstGeom prst="roundRect">
-            <a:avLst>
-              <a:gd name="adj" fmla="val 15000"/>
-            </a:avLst>
+            <a:off x="320040" y="4343400"/>
+            <a:ext cx="914400" cy="13716"/>
+          </a:xfrm>
+          <a:prstGeom prst="rect">
+            <a:avLst/>
           </a:prstGeom>
           <a:solidFill>
-            <a:srgbClr val="2C2723"/>
+            <a:srgbClr val="C9A02D"/>
           </a:solidFill>
           <a:ln>
             <a:noFill/>
@@ -5102,59 +5054,14 @@
       </p:sp>
       <p:sp>
         <p:nvSpPr>
-          <p:cNvPr id="15" name="Rounded Rectangle 14"/>
+          <p:cNvPr id="11" name="Rectangle 10"/>
           <p:cNvSpPr/>
           <p:nvPr/>
         </p:nvSpPr>
         <p:spPr>
           <a:xfrm>
-            <a:off x="274320" y="3200400"/>
-            <a:ext cx="1896687" cy="320040"/>
-          </a:xfrm>
-          <a:prstGeom prst="roundRect">
-            <a:avLst>
-              <a:gd name="adj" fmla="val 15000"/>
-            </a:avLst>
-          </a:prstGeom>
-          <a:solidFill>
-            <a:srgbClr val="AB47BC"/>
-          </a:solidFill>
-          <a:ln>
-            <a:noFill/>
-          </a:ln>
-        </p:spPr>
-        <p:style>
-          <a:lnRef idx="1">
-            <a:schemeClr val="accent1"/>
-          </a:lnRef>
-          <a:fillRef idx="3">
-            <a:schemeClr val="accent1"/>
-          </a:fillRef>
-          <a:effectRef idx="2">
-            <a:schemeClr val="accent1"/>
-          </a:effectRef>
-          <a:fontRef idx="minor">
-            <a:schemeClr val="lt1"/>
-          </a:fontRef>
-        </p:style>
-        <p:txBody>
-          <a:bodyPr rtlCol="0" anchor="ctr"/>
-          <a:lstStyle/>
-          <a:p>
-            <a:pPr algn="ctr"/>
-          </a:p>
-        </p:txBody>
-      </p:sp>
-      <p:sp>
-        <p:nvSpPr>
-          <p:cNvPr id="16" name="Rectangle 15"/>
-          <p:cNvSpPr/>
-          <p:nvPr/>
-        </p:nvSpPr>
-        <p:spPr>
-          <a:xfrm>
-            <a:off x="3374136" y="3200400"/>
-            <a:ext cx="548640" cy="320040"/>
+            <a:off x="320040" y="4571040"/>
+            <a:ext cx="3474720" cy="92171"/>
           </a:xfrm>
           <a:prstGeom prst="rect">
             <a:avLst/>
@@ -5179,75 +5086,84 @@
           </a:fontRef>
         </p:style>
         <p:txBody>
-          <a:bodyPr rtlCol="0" anchor="ctr"/>
-          <a:lstStyle/>
-          <a:p>
-            <a:pPr algn="l"/>
-            <a:r>
-              <a:rPr sz="1300" b="1">
-                <a:solidFill>
-                  <a:srgbClr val="AB47BC"/>
+          <a:bodyPr rtlCol="0" anchor="ctr" wrap="square"/>
+          <a:lstStyle/>
+          <a:p>
+            <a:pPr algn="l">
+              <a:lnSpc>
+                <a:spcPct val="150000"/>
+              </a:lnSpc>
+            </a:pPr>
+            <a:r>
+              <a:rPr sz="1200" b="0">
+                <a:solidFill>
+                  <a:srgbClr val="78716C"/>
                 </a:solidFill>
                 <a:latin typeface="Hiragino Sans"/>
               </a:rPr>
-              <a:t>21.9%</a:t>
-            </a:r>
-          </a:p>
-        </p:txBody>
-      </p:sp>
-      <p:sp>
-        <p:nvSpPr>
-          <p:cNvPr id="17" name="Rectangle 16"/>
+              <a:t>レポートの指摘：</a:t>
+            </a:r>
+          </a:p>
+          <a:p>
+            <a:pPr algn="l">
+              <a:lnSpc>
+                <a:spcPct val="150000"/>
+              </a:lnSpc>
+            </a:pPr>
+            <a:r>
+              <a:rPr sz="1200" b="0">
+                <a:solidFill>
+                  <a:srgbClr val="78716C"/>
+                </a:solidFill>
+                <a:latin typeface="Hiragino Sans"/>
+              </a:rPr>
+              <a:t>恩恵は「実体験」として語られ、</a:t>
+            </a:r>
+          </a:p>
+          <a:p>
+            <a:pPr algn="l">
+              <a:lnSpc>
+                <a:spcPct val="150000"/>
+              </a:lnSpc>
+            </a:pPr>
+            <a:r>
+              <a:rPr sz="1200" b="0">
+                <a:solidFill>
+                  <a:srgbClr val="78716C"/>
+                </a:solidFill>
+                <a:latin typeface="Hiragino Sans"/>
+              </a:rPr>
+              <a:t>懸念は「まだ来ていない未来」として</a:t>
+            </a:r>
+          </a:p>
+          <a:p>
+            <a:pPr algn="l">
+              <a:lnSpc>
+                <a:spcPct val="150000"/>
+              </a:lnSpc>
+            </a:pPr>
+            <a:r>
+              <a:rPr sz="1200" b="0">
+                <a:solidFill>
+                  <a:srgbClr val="78716C"/>
+                </a:solidFill>
+                <a:latin typeface="Hiragino Sans"/>
+              </a:rPr>
+              <a:t>語られた。この非対称性が重要。</a:t>
+            </a:r>
+          </a:p>
+        </p:txBody>
+      </p:sp>
+      <p:sp>
+        <p:nvSpPr>
+          <p:cNvPr id="12" name="Rectangle 11"/>
           <p:cNvSpPr/>
           <p:nvPr/>
         </p:nvSpPr>
         <p:spPr>
           <a:xfrm>
-            <a:off x="274320" y="4114800"/>
-            <a:ext cx="3566160" cy="18288"/>
-          </a:xfrm>
-          <a:prstGeom prst="rect">
-            <a:avLst/>
-          </a:prstGeom>
-          <a:solidFill>
-            <a:srgbClr val="B8942F"/>
-          </a:solidFill>
-          <a:ln>
-            <a:noFill/>
-          </a:ln>
-        </p:spPr>
-        <p:style>
-          <a:lnRef idx="1">
-            <a:schemeClr val="accent1"/>
-          </a:lnRef>
-          <a:fillRef idx="3">
-            <a:schemeClr val="accent1"/>
-          </a:fillRef>
-          <a:effectRef idx="2">
-            <a:schemeClr val="accent1"/>
-          </a:effectRef>
-          <a:fontRef idx="minor">
-            <a:schemeClr val="lt1"/>
-          </a:fontRef>
-        </p:style>
-        <p:txBody>
-          <a:bodyPr rtlCol="0" anchor="ctr"/>
-          <a:lstStyle/>
-          <a:p>
-            <a:pPr algn="ctr"/>
-          </a:p>
-        </p:txBody>
-      </p:sp>
-      <p:sp>
-        <p:nvSpPr>
-          <p:cNvPr id="18" name="Rectangle 17"/>
-          <p:cNvSpPr/>
-          <p:nvPr/>
-        </p:nvSpPr>
-        <p:spPr>
-          <a:xfrm>
-            <a:off x="274320" y="4343400"/>
-            <a:ext cx="3566160" cy="914400"/>
+            <a:off x="320040" y="6720000"/>
+            <a:ext cx="3474720" cy="14977"/>
           </a:xfrm>
           <a:prstGeom prst="rect">
             <a:avLst/>
@@ -5276,50 +5192,18 @@
           <a:lstStyle/>
           <a:p>
             <a:pPr algn="l">
-              <a:spcAft>
-                <a:spcPts val="400"/>
-              </a:spcAft>
+              <a:lnSpc>
+                <a:spcPct val="130000"/>
+              </a:lnSpc>
             </a:pPr>
             <a:r>
-              <a:rPr sz="1200" b="0">
-                <a:solidFill>
-                  <a:srgbClr val="57534E"/>
+              <a:rPr sz="900" b="0">
+                <a:solidFill>
+                  <a:srgbClr val="C9A02D"/>
                 </a:solidFill>
                 <a:latin typeface="Hiragino Sans"/>
               </a:rPr>
-              <a:t>恩恵は「実体験」として語られた。</a:t>
-            </a:r>
-          </a:p>
-          <a:p>
-            <a:pPr algn="l">
-              <a:spcAft>
-                <a:spcPts val="400"/>
-              </a:spcAft>
-            </a:pPr>
-            <a:r>
-              <a:rPr sz="1200" b="0">
-                <a:solidFill>
-                  <a:srgbClr val="57534E"/>
-                </a:solidFill>
-                <a:latin typeface="Hiragino Sans"/>
-              </a:rPr>
-              <a:t>懸念の多くは「まだ起きていないが</a:t>
-            </a:r>
-          </a:p>
-          <a:p>
-            <a:pPr algn="l">
-              <a:spcAft>
-                <a:spcPts val="400"/>
-              </a:spcAft>
-            </a:pPr>
-            <a:r>
-              <a:rPr sz="1200" b="0">
-                <a:solidFill>
-                  <a:srgbClr val="57534E"/>
-                </a:solidFill>
-                <a:latin typeface="Hiragino Sans"/>
-              </a:rPr>
-              <a:t>起きるかもしれない」という予測。</a:t>
+              <a:t>HARMONIC insight</a:t>
             </a:r>
           </a:p>
         </p:txBody>
@@ -5338,7 +5222,7 @@
     <p:bg>
       <p:bgPr>
         <a:solidFill>
-          <a:srgbClr val="1C1917"/>
+          <a:srgbClr val="12100E"/>
         </a:solidFill>
         <a:effectLst/>
       </p:bgPr>
@@ -5358,51 +5242,8 @@
         </p:nvSpPr>
         <p:spPr>
           <a:xfrm>
-            <a:off x="0" y="0"/>
-            <a:ext cx="4114800" cy="54864"/>
-          </a:xfrm>
-          <a:prstGeom prst="rect">
-            <a:avLst/>
-          </a:prstGeom>
-          <a:solidFill>
-            <a:srgbClr val="B8942F"/>
-          </a:solidFill>
-          <a:ln>
-            <a:noFill/>
-          </a:ln>
-        </p:spPr>
-        <p:style>
-          <a:lnRef idx="1">
-            <a:schemeClr val="accent1"/>
-          </a:lnRef>
-          <a:fillRef idx="3">
-            <a:schemeClr val="accent1"/>
-          </a:fillRef>
-          <a:effectRef idx="2">
-            <a:schemeClr val="accent1"/>
-          </a:effectRef>
-          <a:fontRef idx="minor">
-            <a:schemeClr val="lt1"/>
-          </a:fontRef>
-        </p:style>
-        <p:txBody>
-          <a:bodyPr rtlCol="0" anchor="ctr"/>
-          <a:lstStyle/>
-          <a:p>
-            <a:pPr algn="ctr"/>
-          </a:p>
-        </p:txBody>
-      </p:sp>
-      <p:sp>
-        <p:nvSpPr>
-          <p:cNvPr id="3" name="Rectangle 2"/>
-          <p:cNvSpPr/>
-          <p:nvPr/>
-        </p:nvSpPr>
-        <p:spPr>
-          <a:xfrm>
-            <a:off x="274320" y="6675120"/>
-            <a:ext cx="3566160" cy="365760"/>
+            <a:off x="320040" y="1600200"/>
+            <a:ext cx="3474720" cy="149778"/>
           </a:xfrm>
           <a:prstGeom prst="rect">
             <a:avLst/>
@@ -5430,29 +5271,65 @@
           <a:bodyPr rtlCol="0" anchor="ctr" wrap="square"/>
           <a:lstStyle/>
           <a:p>
-            <a:pPr algn="l"/>
-            <a:r>
-              <a:rPr sz="900">
-                <a:solidFill>
-                  <a:srgbClr val="B8942F"/>
+            <a:pPr algn="l">
+              <a:lnSpc>
+                <a:spcPct val="130000"/>
+              </a:lnSpc>
+            </a:pPr>
+            <a:r>
+              <a:rPr sz="3000" b="1">
+                <a:solidFill>
+                  <a:srgbClr val="F5F0EB"/>
                 </a:solidFill>
                 <a:latin typeface="Hiragino Sans"/>
               </a:rPr>
-              <a:t>HARMONIC insight</a:t>
-            </a:r>
-          </a:p>
-        </p:txBody>
-      </p:sp>
-      <p:sp>
-        <p:nvSpPr>
-          <p:cNvPr id="4" name="Rectangle 3"/>
+              <a:t>光と影は、</a:t>
+            </a:r>
+          </a:p>
+          <a:p>
+            <a:pPr algn="l">
+              <a:lnSpc>
+                <a:spcPct val="130000"/>
+              </a:lnSpc>
+            </a:pPr>
+            <a:r>
+              <a:rPr sz="3000" b="1">
+                <a:solidFill>
+                  <a:srgbClr val="F5F0EB"/>
+                </a:solidFill>
+                <a:latin typeface="Hiragino Sans"/>
+              </a:rPr>
+              <a:t>同じ人の</a:t>
+            </a:r>
+          </a:p>
+          <a:p>
+            <a:pPr algn="l">
+              <a:lnSpc>
+                <a:spcPct val="130000"/>
+              </a:lnSpc>
+            </a:pPr>
+            <a:r>
+              <a:rPr sz="3000" b="1">
+                <a:solidFill>
+                  <a:srgbClr val="F5F0EB"/>
+                </a:solidFill>
+                <a:latin typeface="Hiragino Sans"/>
+              </a:rPr>
+              <a:t>中にある。</a:t>
+            </a:r>
+          </a:p>
+        </p:txBody>
+      </p:sp>
+      <p:sp>
+        <p:nvSpPr>
+          <p:cNvPr id="3" name="Rectangle 2"/>
           <p:cNvSpPr/>
           <p:nvPr/>
         </p:nvSpPr>
         <p:spPr>
           <a:xfrm>
-            <a:off x="274320" y="1600200"/>
-            <a:ext cx="3566160" cy="1600200"/>
+            <a:off x="320040" y="3429000"/>
+            <a:ext cx="3474720" cy="99852"/>
           </a:xfrm>
           <a:prstGeom prst="rect">
             <a:avLst/>
@@ -5481,107 +5358,48 @@
           <a:lstStyle/>
           <a:p>
             <a:pPr algn="l">
-              <a:spcAft>
-                <a:spcPts val="400"/>
-              </a:spcAft>
+              <a:lnSpc>
+                <a:spcPct val="130000"/>
+              </a:lnSpc>
             </a:pPr>
             <a:r>
-              <a:rPr sz="2800" b="1">
-                <a:solidFill>
-                  <a:srgbClr val="FFFFFF"/>
+              <a:rPr sz="3000" b="1">
+                <a:solidFill>
+                  <a:srgbClr val="C9A02D"/>
                 </a:solidFill>
                 <a:latin typeface="Hiragino Sans"/>
               </a:rPr>
-              <a:t>光と影は、</a:t>
+              <a:t>だからAIは</a:t>
             </a:r>
           </a:p>
           <a:p>
             <a:pPr algn="l">
-              <a:spcAft>
-                <a:spcPts val="400"/>
-              </a:spcAft>
+              <a:lnSpc>
+                <a:spcPct val="130000"/>
+              </a:lnSpc>
             </a:pPr>
             <a:r>
-              <a:rPr sz="2800" b="1">
-                <a:solidFill>
-                  <a:srgbClr val="FFFFFF"/>
+              <a:rPr sz="3000" b="1">
+                <a:solidFill>
+                  <a:srgbClr val="C9A02D"/>
                 </a:solidFill>
                 <a:latin typeface="Hiragino Sans"/>
               </a:rPr>
-              <a:t>同じ人の中に</a:t>
-            </a:r>
-          </a:p>
-          <a:p>
-            <a:pPr algn="l">
-              <a:spcAft>
-                <a:spcPts val="400"/>
-              </a:spcAft>
-            </a:pPr>
-            <a:r>
-              <a:rPr sz="2800" b="1">
-                <a:solidFill>
-                  <a:srgbClr val="FFFFFF"/>
-                </a:solidFill>
-                <a:latin typeface="Hiragino Sans"/>
-              </a:rPr>
-              <a:t>ある。</a:t>
-            </a:r>
-          </a:p>
-        </p:txBody>
-      </p:sp>
-      <p:sp>
-        <p:nvSpPr>
-          <p:cNvPr id="5" name="Rectangle 4"/>
+              <a:t>設計して使う。</a:t>
+            </a:r>
+          </a:p>
+        </p:txBody>
+      </p:sp>
+      <p:sp>
+        <p:nvSpPr>
+          <p:cNvPr id="4" name="Rectangle 3"/>
           <p:cNvSpPr/>
           <p:nvPr/>
         </p:nvSpPr>
         <p:spPr>
           <a:xfrm>
-            <a:off x="274320" y="3429000"/>
-            <a:ext cx="3566160" cy="18288"/>
-          </a:xfrm>
-          <a:prstGeom prst="rect">
-            <a:avLst/>
-          </a:prstGeom>
-          <a:solidFill>
-            <a:srgbClr val="B8942F"/>
-          </a:solidFill>
-          <a:ln>
-            <a:noFill/>
-          </a:ln>
-        </p:spPr>
-        <p:style>
-          <a:lnRef idx="1">
-            <a:schemeClr val="accent1"/>
-          </a:lnRef>
-          <a:fillRef idx="3">
-            <a:schemeClr val="accent1"/>
-          </a:fillRef>
-          <a:effectRef idx="2">
-            <a:schemeClr val="accent1"/>
-          </a:effectRef>
-          <a:fontRef idx="minor">
-            <a:schemeClr val="lt1"/>
-          </a:fontRef>
-        </p:style>
-        <p:txBody>
-          <a:bodyPr rtlCol="0" anchor="ctr"/>
-          <a:lstStyle/>
-          <a:p>
-            <a:pPr algn="ctr"/>
-          </a:p>
-        </p:txBody>
-      </p:sp>
-      <p:sp>
-        <p:nvSpPr>
-          <p:cNvPr id="6" name="Rectangle 5"/>
-          <p:cNvSpPr/>
-          <p:nvPr/>
-        </p:nvSpPr>
-        <p:spPr>
-          <a:xfrm>
-            <a:off x="274320" y="3657600"/>
-            <a:ext cx="3566160" cy="1143000"/>
+            <a:off x="320040" y="6172200"/>
+            <a:ext cx="3474720" cy="13313"/>
           </a:xfrm>
           <a:prstGeom prst="rect">
             <a:avLst/>
@@ -5610,48 +5428,32 @@
           <a:lstStyle/>
           <a:p>
             <a:pPr algn="l">
-              <a:spcAft>
-                <a:spcPts val="400"/>
-              </a:spcAft>
+              <a:lnSpc>
+                <a:spcPct val="130000"/>
+              </a:lnSpc>
             </a:pPr>
             <a:r>
-              <a:rPr sz="2800" b="1">
-                <a:solidFill>
-                  <a:srgbClr val="B8942F"/>
+              <a:rPr sz="800" b="0">
+                <a:solidFill>
+                  <a:srgbClr val="4A4540"/>
                 </a:solidFill>
                 <a:latin typeface="Hiragino Sans"/>
               </a:rPr>
-              <a:t>だからAIは</a:t>
-            </a:r>
-          </a:p>
-          <a:p>
-            <a:pPr algn="l">
-              <a:spcAft>
-                <a:spcPts val="400"/>
-              </a:spcAft>
-            </a:pPr>
-            <a:r>
-              <a:rPr sz="2800" b="1">
-                <a:solidFill>
-                  <a:srgbClr val="B8942F"/>
-                </a:solidFill>
-                <a:latin typeface="Hiragino Sans"/>
-              </a:rPr>
-              <a:t>設計して使う。</a:t>
-            </a:r>
-          </a:p>
-        </p:txBody>
-      </p:sp>
-      <p:sp>
-        <p:nvSpPr>
-          <p:cNvPr id="7" name="Rectangle 6"/>
+              <a:t>Anthropic "81,000 Interviews" 2026年3月18日</a:t>
+            </a:r>
+          </a:p>
+        </p:txBody>
+      </p:sp>
+      <p:sp>
+        <p:nvSpPr>
+          <p:cNvPr id="5" name="Rectangle 4"/>
           <p:cNvSpPr/>
           <p:nvPr/>
         </p:nvSpPr>
         <p:spPr>
           <a:xfrm>
-            <a:off x="274320" y="5486400"/>
-            <a:ext cx="3566160" cy="457200"/>
+            <a:off x="320040" y="6720000"/>
+            <a:ext cx="3474720" cy="14977"/>
           </a:xfrm>
           <a:prstGeom prst="rect">
             <a:avLst/>
@@ -5680,18 +5482,18 @@
           <a:lstStyle/>
           <a:p>
             <a:pPr algn="l">
-              <a:spcAft>
-                <a:spcPts val="400"/>
-              </a:spcAft>
+              <a:lnSpc>
+                <a:spcPct val="130000"/>
+              </a:lnSpc>
             </a:pPr>
             <a:r>
               <a:rPr sz="900" b="0">
                 <a:solidFill>
-                  <a:srgbClr val="57534E"/>
+                  <a:srgbClr val="C9A02D"/>
                 </a:solidFill>
                 <a:latin typeface="Hiragino Sans"/>
               </a:rPr>
-              <a:t>出典: Anthropic "81,000 Interviews" 2026</a:t>
+              <a:t>HARMONIC insight</a:t>
             </a:r>
           </a:p>
         </p:txBody>

--- a/content/youtube/shorts/SHORT_NEWS_03_anthropic_light_shade.pptx
+++ b/content/youtube/shorts/SHORT_NEWS_03_anthropic_light_shade.pptx
@@ -3088,7 +3088,7 @@
     <p:bg>
       <p:bgPr>
         <a:solidFill>
-          <a:srgbClr val="12100E"/>
+          <a:srgbClr val="FAF8F5"/>
         </a:solidFill>
         <a:effectLst/>
       </p:bgPr>
@@ -3108,8 +3108,8 @@
         </p:nvSpPr>
         <p:spPr>
           <a:xfrm>
-            <a:off x="320040" y="457200"/>
-            <a:ext cx="1645920" cy="274320"/>
+            <a:off x="365760" y="548640"/>
+            <a:ext cx="1737360" cy="274320"/>
           </a:xfrm>
           <a:prstGeom prst="roundRect">
             <a:avLst>
@@ -3117,7 +3117,7 @@
             </a:avLst>
           </a:prstGeom>
           <a:solidFill>
-            <a:srgbClr val="E84D3D"/>
+            <a:srgbClr val="B5453A"/>
           </a:solidFill>
           <a:ln>
             <a:noFill/>
@@ -3138,14 +3138,14 @@
           </a:fontRef>
         </p:style>
         <p:txBody>
-          <a:bodyPr rtlCol="0" anchor="ctr" wrap="none"/>
+          <a:bodyPr rtlCol="0" anchor="ctr"/>
           <a:lstStyle/>
           <a:p>
             <a:pPr algn="ctr"/>
             <a:r>
-              <a:rPr sz="1100" b="1">
-                <a:solidFill>
-                  <a:srgbClr val="F5F0EB"/>
+              <a:rPr sz="1000" b="1">
+                <a:solidFill>
+                  <a:srgbClr val="FFFFFF"/>
                 </a:solidFill>
                 <a:latin typeface="Hiragino Sans"/>
               </a:rPr>
@@ -3162,8 +3162,8 @@
         </p:nvSpPr>
         <p:spPr>
           <a:xfrm>
-            <a:off x="320040" y="1143000"/>
-            <a:ext cx="3474720" cy="139793"/>
+            <a:off x="365760" y="1371600"/>
+            <a:ext cx="3383280" cy="139080"/>
           </a:xfrm>
           <a:prstGeom prst="rect">
             <a:avLst/>
@@ -3197,9 +3197,9 @@
               </a:lnSpc>
             </a:pPr>
             <a:r>
-              <a:rPr sz="2800" b="1">
-                <a:solidFill>
-                  <a:srgbClr val="F5F0EB"/>
+              <a:rPr sz="2600" b="1">
+                <a:solidFill>
+                  <a:srgbClr val="1C1917"/>
                 </a:solidFill>
                 <a:latin typeface="Hiragino Sans"/>
               </a:rPr>
@@ -3213,9 +3213,9 @@
               </a:lnSpc>
             </a:pPr>
             <a:r>
-              <a:rPr sz="2800" b="1">
-                <a:solidFill>
-                  <a:srgbClr val="F5F0EB"/>
+              <a:rPr sz="2600" b="1">
+                <a:solidFill>
+                  <a:srgbClr val="1C1917"/>
                 </a:solidFill>
                 <a:latin typeface="Hiragino Sans"/>
               </a:rPr>
@@ -3229,9 +3229,9 @@
               </a:lnSpc>
             </a:pPr>
             <a:r>
-              <a:rPr sz="2800" b="1">
-                <a:solidFill>
-                  <a:srgbClr val="F5F0EB"/>
+              <a:rPr sz="2600" b="1">
+                <a:solidFill>
+                  <a:srgbClr val="1C1917"/>
                 </a:solidFill>
                 <a:latin typeface="Hiragino Sans"/>
               </a:rPr>
@@ -3248,8 +3248,8 @@
         </p:nvSpPr>
         <p:spPr>
           <a:xfrm>
-            <a:off x="320040" y="2743200"/>
-            <a:ext cx="3474720" cy="99852"/>
+            <a:off x="365760" y="2971800"/>
+            <a:ext cx="3383280" cy="106984"/>
           </a:xfrm>
           <a:prstGeom prst="rect">
             <a:avLst/>
@@ -3285,7 +3285,7 @@
             <a:r>
               <a:rPr sz="3000" b="1">
                 <a:solidFill>
-                  <a:srgbClr val="E84D3D"/>
+                  <a:srgbClr val="B5453A"/>
                 </a:solidFill>
                 <a:latin typeface="Hiragino Sans"/>
               </a:rPr>
@@ -3301,7 +3301,7 @@
             <a:r>
               <a:rPr sz="3000" b="1">
                 <a:solidFill>
-                  <a:srgbClr val="E84D3D"/>
+                  <a:srgbClr val="B5453A"/>
                 </a:solidFill>
                 <a:latin typeface="Hiragino Sans"/>
               </a:rPr>
@@ -3318,14 +3318,14 @@
         </p:nvSpPr>
         <p:spPr>
           <a:xfrm>
-            <a:off x="320040" y="3886200"/>
+            <a:off x="365760" y="4114800"/>
             <a:ext cx="914400" cy="13716"/>
           </a:xfrm>
           <a:prstGeom prst="rect">
             <a:avLst/>
           </a:prstGeom>
           <a:solidFill>
-            <a:srgbClr val="C9A02D"/>
+            <a:srgbClr val="B8942F"/>
           </a:solidFill>
           <a:ln>
             <a:noFill/>
@@ -3361,8 +3361,8 @@
         </p:nvSpPr>
         <p:spPr>
           <a:xfrm>
-            <a:off x="320040" y="4114800"/>
-            <a:ext cx="3474720" cy="39940"/>
+            <a:off x="365760" y="4343400"/>
+            <a:ext cx="3383280" cy="39227"/>
           </a:xfrm>
           <a:prstGeom prst="rect">
             <a:avLst/>
@@ -3396,9 +3396,9 @@
               </a:lnSpc>
             </a:pPr>
             <a:r>
-              <a:rPr sz="1200" b="0">
-                <a:solidFill>
-                  <a:srgbClr val="78716C"/>
+              <a:rPr sz="1100" b="0">
+                <a:solidFill>
+                  <a:srgbClr val="7A6652"/>
                 </a:solidFill>
                 <a:latin typeface="Hiragino Sans"/>
               </a:rPr>
@@ -3412,9 +3412,9 @@
               </a:lnSpc>
             </a:pPr>
             <a:r>
-              <a:rPr sz="1200" b="0">
-                <a:solidFill>
-                  <a:srgbClr val="78716C"/>
+              <a:rPr sz="1100" b="0">
+                <a:solidFill>
+                  <a:srgbClr val="7A6652"/>
                 </a:solidFill>
                 <a:latin typeface="Hiragino Sans"/>
               </a:rPr>
@@ -3431,8 +3431,8 @@
         </p:nvSpPr>
         <p:spPr>
           <a:xfrm>
-            <a:off x="320040" y="6720000"/>
-            <a:ext cx="3474720" cy="14977"/>
+            <a:off x="365760" y="6720000"/>
+            <a:ext cx="3383280" cy="16047"/>
           </a:xfrm>
           <a:prstGeom prst="rect">
             <a:avLst/>
@@ -3468,7 +3468,7 @@
             <a:r>
               <a:rPr sz="900" b="0">
                 <a:solidFill>
-                  <a:srgbClr val="C9A02D"/>
+                  <a:srgbClr val="B8942F"/>
                 </a:solidFill>
                 <a:latin typeface="Hiragino Sans"/>
               </a:rPr>
@@ -3491,7 +3491,7 @@
     <p:bg>
       <p:bgPr>
         <a:solidFill>
-          <a:srgbClr val="12100E"/>
+          <a:srgbClr val="FAF8F5"/>
         </a:solidFill>
         <a:effectLst/>
       </p:bgPr>
@@ -3511,8 +3511,8 @@
         </p:nvSpPr>
         <p:spPr>
           <a:xfrm>
-            <a:off x="320040" y="548640"/>
-            <a:ext cx="3474720" cy="53254"/>
+            <a:off x="365760" y="457200"/>
+            <a:ext cx="3383280" cy="49926"/>
           </a:xfrm>
           <a:prstGeom prst="rect">
             <a:avLst/>
@@ -3546,9 +3546,9 @@
               </a:lnSpc>
             </a:pPr>
             <a:r>
-              <a:rPr sz="1600" b="0">
-                <a:solidFill>
-                  <a:srgbClr val="78716C"/>
+              <a:rPr sz="1400" b="0">
+                <a:solidFill>
+                  <a:srgbClr val="7A6652"/>
                 </a:solidFill>
                 <a:latin typeface="Hiragino Sans"/>
               </a:rPr>
@@ -3562,9 +3562,9 @@
               </a:lnSpc>
             </a:pPr>
             <a:r>
-              <a:rPr sz="1600" b="0">
-                <a:solidFill>
-                  <a:srgbClr val="78716C"/>
+              <a:rPr sz="1400" b="0">
+                <a:solidFill>
+                  <a:srgbClr val="7A6652"/>
                 </a:solidFill>
                 <a:latin typeface="Hiragino Sans"/>
               </a:rPr>
@@ -3581,14 +3581,14 @@
         </p:nvSpPr>
         <p:spPr>
           <a:xfrm>
-            <a:off x="320040" y="1143000"/>
+            <a:off x="365760" y="1005840"/>
             <a:ext cx="914400" cy="13716"/>
           </a:xfrm>
           <a:prstGeom prst="rect">
             <a:avLst/>
           </a:prstGeom>
           <a:solidFill>
-            <a:srgbClr val="C9A02D"/>
+            <a:srgbClr val="B8942F"/>
           </a:solidFill>
           <a:ln>
             <a:noFill/>
@@ -3624,8 +3624,8 @@
         </p:nvSpPr>
         <p:spPr>
           <a:xfrm>
-            <a:off x="320040" y="1371600"/>
-            <a:ext cx="3474720" cy="73225"/>
+            <a:off x="365760" y="1143000"/>
+            <a:ext cx="3383280" cy="71323"/>
           </a:xfrm>
           <a:prstGeom prst="rect">
             <a:avLst/>
@@ -3659,9 +3659,9 @@
               </a:lnSpc>
             </a:pPr>
             <a:r>
-              <a:rPr sz="2200" b="1">
-                <a:solidFill>
-                  <a:srgbClr val="F5F0EB"/>
+              <a:rPr sz="2000" b="1">
+                <a:solidFill>
+                  <a:srgbClr val="1C1917"/>
                 </a:solidFill>
                 <a:latin typeface="Hiragino Sans"/>
               </a:rPr>
@@ -3675,9 +3675,9 @@
               </a:lnSpc>
             </a:pPr>
             <a:r>
-              <a:rPr sz="2200" b="1">
-                <a:solidFill>
-                  <a:srgbClr val="F5F0EB"/>
+              <a:rPr sz="2000" b="1">
+                <a:solidFill>
+                  <a:srgbClr val="1C1917"/>
                 </a:solidFill>
                 <a:latin typeface="Hiragino Sans"/>
               </a:rPr>
@@ -3694,8 +3694,8 @@
         </p:nvSpPr>
         <p:spPr>
           <a:xfrm>
-            <a:off x="320040" y="2286000"/>
-            <a:ext cx="3474720" cy="26627"/>
+            <a:off x="365760" y="1828800"/>
+            <a:ext cx="3383280" cy="24963"/>
           </a:xfrm>
           <a:prstGeom prst="rect">
             <a:avLst/>
@@ -3729,9 +3729,9 @@
               </a:lnSpc>
             </a:pPr>
             <a:r>
-              <a:rPr sz="1600" b="0">
-                <a:solidFill>
-                  <a:srgbClr val="78716C"/>
+              <a:rPr sz="1400" b="0">
+                <a:solidFill>
+                  <a:srgbClr val="7A6652"/>
                 </a:solidFill>
                 <a:latin typeface="Hiragino Sans"/>
               </a:rPr>
@@ -3748,8 +3748,8 @@
         </p:nvSpPr>
         <p:spPr>
           <a:xfrm>
-            <a:off x="320040" y="2743200"/>
-            <a:ext cx="3474720" cy="87782"/>
+            <a:off x="365760" y="2286000"/>
+            <a:ext cx="3383280" cy="93634"/>
           </a:xfrm>
           <a:prstGeom prst="rect">
             <a:avLst/>
@@ -3774,14 +3774,14 @@
           </a:fontRef>
         </p:style>
         <p:txBody>
-          <a:bodyPr rtlCol="0" anchor="ctr" wrap="none"/>
+          <a:bodyPr rtlCol="0" anchor="ctr"/>
           <a:lstStyle/>
           <a:p>
             <a:pPr algn="l"/>
             <a:r>
               <a:rPr sz="6400" b="1">
                 <a:solidFill>
-                  <a:srgbClr val="E84D3D"/>
+                  <a:srgbClr val="B5453A"/>
                 </a:solidFill>
                 <a:latin typeface="Hiragino Sans"/>
               </a:rPr>
@@ -3790,7 +3790,7 @@
             <a:r>
               <a:rPr sz="2800" b="1">
                 <a:solidFill>
-                  <a:srgbClr val="E84D3D"/>
+                  <a:srgbClr val="B5453A"/>
                 </a:solidFill>
                 <a:latin typeface="Hiragino Sans"/>
               </a:rPr>
@@ -3807,14 +3807,14 @@
         </p:nvSpPr>
         <p:spPr>
           <a:xfrm>
-            <a:off x="320040" y="3886200"/>
+            <a:off x="365760" y="3429000"/>
             <a:ext cx="914400" cy="13716"/>
           </a:xfrm>
           <a:prstGeom prst="rect">
             <a:avLst/>
           </a:prstGeom>
           <a:solidFill>
-            <a:srgbClr val="C9A02D"/>
+            <a:srgbClr val="B8942F"/>
           </a:solidFill>
           <a:ln>
             <a:noFill/>
@@ -3850,8 +3850,8 @@
         </p:nvSpPr>
         <p:spPr>
           <a:xfrm>
-            <a:off x="320040" y="4114800"/>
-            <a:ext cx="3474720" cy="46597"/>
+            <a:off x="365760" y="3657600"/>
+            <a:ext cx="3383280" cy="46360"/>
           </a:xfrm>
           <a:prstGeom prst="rect">
             <a:avLst/>
@@ -3885,9 +3885,9 @@
               </a:lnSpc>
             </a:pPr>
             <a:r>
-              <a:rPr sz="1400" b="0">
-                <a:solidFill>
-                  <a:srgbClr val="78716C"/>
+              <a:rPr sz="1300" b="0">
+                <a:solidFill>
+                  <a:srgbClr val="7A6652"/>
                 </a:solidFill>
                 <a:latin typeface="Hiragino Sans"/>
               </a:rPr>
@@ -3901,9 +3901,9 @@
               </a:lnSpc>
             </a:pPr>
             <a:r>
-              <a:rPr sz="1400" b="0">
-                <a:solidFill>
-                  <a:srgbClr val="78716C"/>
+              <a:rPr sz="1300" b="0">
+                <a:solidFill>
+                  <a:srgbClr val="7A6652"/>
                 </a:solidFill>
                 <a:latin typeface="Hiragino Sans"/>
               </a:rPr>
@@ -3920,8 +3920,8 @@
         </p:nvSpPr>
         <p:spPr>
           <a:xfrm>
-            <a:off x="320040" y="4800600"/>
-            <a:ext cx="3474720" cy="65836"/>
+            <a:off x="365760" y="4343400"/>
+            <a:ext cx="3383280" cy="70225"/>
           </a:xfrm>
           <a:prstGeom prst="rect">
             <a:avLst/>
@@ -3946,14 +3946,14 @@
           </a:fontRef>
         </p:style>
         <p:txBody>
-          <a:bodyPr rtlCol="0" anchor="ctr" wrap="none"/>
+          <a:bodyPr rtlCol="0" anchor="ctr"/>
           <a:lstStyle/>
           <a:p>
             <a:pPr algn="l"/>
             <a:r>
               <a:rPr sz="4800" b="1">
                 <a:solidFill>
-                  <a:srgbClr val="FFB300"/>
+                  <a:srgbClr val="C17817"/>
                 </a:solidFill>
                 <a:latin typeface="Hiragino Sans"/>
               </a:rPr>
@@ -3962,7 +3962,7 @@
             <a:r>
               <a:rPr sz="2400" b="1">
                 <a:solidFill>
-                  <a:srgbClr val="FFB300"/>
+                  <a:srgbClr val="C17817"/>
                 </a:solidFill>
                 <a:latin typeface="Hiragino Sans"/>
               </a:rPr>
@@ -3979,8 +3979,8 @@
         </p:nvSpPr>
         <p:spPr>
           <a:xfrm>
-            <a:off x="320040" y="6400000"/>
-            <a:ext cx="3474720" cy="13313"/>
+            <a:off x="365760" y="6400000"/>
+            <a:ext cx="3383280" cy="12481"/>
           </a:xfrm>
           <a:prstGeom prst="rect">
             <a:avLst/>
@@ -4014,9 +4014,9 @@
               </a:lnSpc>
             </a:pPr>
             <a:r>
-              <a:rPr sz="800" b="0">
-                <a:solidFill>
-                  <a:srgbClr val="4A4540"/>
+              <a:rPr sz="700" b="0">
+                <a:solidFill>
+                  <a:srgbClr val="BFAD9C"/>
                 </a:solidFill>
                 <a:latin typeface="Hiragino Sans"/>
               </a:rPr>
@@ -4033,8 +4033,8 @@
         </p:nvSpPr>
         <p:spPr>
           <a:xfrm>
-            <a:off x="320040" y="6720000"/>
-            <a:ext cx="3474720" cy="14977"/>
+            <a:off x="365760" y="6720000"/>
+            <a:ext cx="3383280" cy="16047"/>
           </a:xfrm>
           <a:prstGeom prst="rect">
             <a:avLst/>
@@ -4070,7 +4070,7 @@
             <a:r>
               <a:rPr sz="900" b="0">
                 <a:solidFill>
-                  <a:srgbClr val="C9A02D"/>
+                  <a:srgbClr val="B8942F"/>
                 </a:solidFill>
                 <a:latin typeface="Hiragino Sans"/>
               </a:rPr>
@@ -4093,7 +4093,7 @@
     <p:bg>
       <p:bgPr>
         <a:solidFill>
-          <a:srgbClr val="12100E"/>
+          <a:srgbClr val="FAF8F5"/>
         </a:solidFill>
         <a:effectLst/>
       </p:bgPr>
@@ -4114,13 +4114,13 @@
         <p:spPr>
           <a:xfrm>
             <a:off x="0" y="914400"/>
-            <a:ext cx="36576" cy="3657600"/>
+            <a:ext cx="32000" cy="3886200"/>
           </a:xfrm>
           <a:prstGeom prst="rect">
             <a:avLst/>
           </a:prstGeom>
           <a:solidFill>
-            <a:srgbClr val="C9A02D"/>
+            <a:srgbClr val="B8942F"/>
           </a:solidFill>
           <a:ln>
             <a:noFill/>
@@ -4156,8 +4156,8 @@
         </p:nvSpPr>
         <p:spPr>
           <a:xfrm>
-            <a:off x="320040" y="914400"/>
-            <a:ext cx="3474720" cy="46597"/>
+            <a:off x="365760" y="914400"/>
+            <a:ext cx="3383280" cy="46360"/>
           </a:xfrm>
           <a:prstGeom prst="rect">
             <a:avLst/>
@@ -4191,9 +4191,9 @@
               </a:lnSpc>
             </a:pPr>
             <a:r>
-              <a:rPr sz="1400" b="0">
-                <a:solidFill>
-                  <a:srgbClr val="78716C"/>
+              <a:rPr sz="1300" b="0">
+                <a:solidFill>
+                  <a:srgbClr val="7A6652"/>
                 </a:solidFill>
                 <a:latin typeface="Hiragino Sans"/>
               </a:rPr>
@@ -4207,13 +4207,13 @@
               </a:lnSpc>
             </a:pPr>
             <a:r>
-              <a:rPr sz="1400" b="0">
-                <a:solidFill>
-                  <a:srgbClr val="78716C"/>
+              <a:rPr sz="1300" b="0">
+                <a:solidFill>
+                  <a:srgbClr val="7A6652"/>
                 </a:solidFill>
                 <a:latin typeface="Hiragino Sans"/>
               </a:rPr>
-              <a:t>イスラエルの弁護士</a:t>
+              <a:t>イスラエルの弁護士の声</a:t>
             </a:r>
           </a:p>
         </p:txBody>
@@ -4226,8 +4226,8 @@
         </p:nvSpPr>
         <p:spPr>
           <a:xfrm>
-            <a:off x="320040" y="1600200"/>
-            <a:ext cx="3474720" cy="157715"/>
+            <a:off x="365760" y="1600200"/>
+            <a:ext cx="3383280" cy="168981"/>
           </a:xfrm>
           <a:prstGeom prst="rect">
             <a:avLst/>
@@ -4263,7 +4263,7 @@
             <a:r>
               <a:rPr sz="2200" b="1">
                 <a:solidFill>
-                  <a:srgbClr val="F5F0EB"/>
+                  <a:srgbClr val="1C1917"/>
                 </a:solidFill>
                 <a:latin typeface="Hiragino Sans"/>
               </a:rPr>
@@ -4279,7 +4279,7 @@
             <a:r>
               <a:rPr sz="2200" b="1">
                 <a:solidFill>
-                  <a:srgbClr val="F5F0EB"/>
+                  <a:srgbClr val="1C1917"/>
                 </a:solidFill>
                 <a:latin typeface="Hiragino Sans"/>
               </a:rPr>
@@ -4295,7 +4295,7 @@
             <a:r>
               <a:rPr sz="2200" b="1">
                 <a:solidFill>
-                  <a:srgbClr val="F5F0EB"/>
+                  <a:srgbClr val="1C1917"/>
                 </a:solidFill>
                 <a:latin typeface="Hiragino Sans"/>
               </a:rPr>
@@ -4311,7 +4311,7 @@
             <a:r>
               <a:rPr sz="2200" b="1">
                 <a:solidFill>
-                  <a:srgbClr val="F5F0EB"/>
+                  <a:srgbClr val="1C1917"/>
                 </a:solidFill>
                 <a:latin typeface="Hiragino Sans"/>
               </a:rPr>
@@ -4328,8 +4328,8 @@
         </p:nvSpPr>
         <p:spPr>
           <a:xfrm>
-            <a:off x="320040" y="3200400"/>
-            <a:ext cx="3474720" cy="197144"/>
+            <a:off x="365760" y="3200400"/>
+            <a:ext cx="3383280" cy="211226"/>
           </a:xfrm>
           <a:prstGeom prst="rect">
             <a:avLst/>
@@ -4365,7 +4365,7 @@
             <a:r>
               <a:rPr sz="2200" b="1">
                 <a:solidFill>
-                  <a:srgbClr val="FFB300"/>
+                  <a:srgbClr val="C17817"/>
                 </a:solidFill>
                 <a:latin typeface="Hiragino Sans"/>
               </a:rPr>
@@ -4381,7 +4381,7 @@
             <a:r>
               <a:rPr sz="2200" b="1">
                 <a:solidFill>
-                  <a:srgbClr val="FFB300"/>
+                  <a:srgbClr val="C17817"/>
                 </a:solidFill>
                 <a:latin typeface="Hiragino Sans"/>
               </a:rPr>
@@ -4397,7 +4397,7 @@
             <a:r>
               <a:rPr sz="2200" b="1">
                 <a:solidFill>
-                  <a:srgbClr val="FFB300"/>
+                  <a:srgbClr val="C17817"/>
                 </a:solidFill>
                 <a:latin typeface="Hiragino Sans"/>
               </a:rPr>
@@ -4413,7 +4413,7 @@
             <a:r>
               <a:rPr sz="2200" b="1">
                 <a:solidFill>
-                  <a:srgbClr val="FFB300"/>
+                  <a:srgbClr val="C17817"/>
                 </a:solidFill>
                 <a:latin typeface="Hiragino Sans"/>
               </a:rPr>
@@ -4429,7 +4429,7 @@
             <a:r>
               <a:rPr sz="2200" b="1">
                 <a:solidFill>
-                  <a:srgbClr val="FFB300"/>
+                  <a:srgbClr val="C17817"/>
                 </a:solidFill>
                 <a:latin typeface="Hiragino Sans"/>
               </a:rPr>
@@ -4446,8 +4446,8 @@
         </p:nvSpPr>
         <p:spPr>
           <a:xfrm>
-            <a:off x="320040" y="5486400"/>
-            <a:ext cx="3474720" cy="18306"/>
+            <a:off x="365760" y="5486400"/>
+            <a:ext cx="3383280" cy="17830"/>
           </a:xfrm>
           <a:prstGeom prst="rect">
             <a:avLst/>
@@ -4481,13 +4481,13 @@
               </a:lnSpc>
             </a:pPr>
             <a:r>
-              <a:rPr sz="1100" b="0">
-                <a:solidFill>
-                  <a:srgbClr val="4A4540"/>
+              <a:rPr sz="1000" b="0">
+                <a:solidFill>
+                  <a:srgbClr val="BFAD9C"/>
                 </a:solidFill>
                 <a:latin typeface="Hiragino Sans"/>
               </a:rPr>
-              <a:t>── 実名で語られた、リアルな声</a:t>
+              <a:t>── 実名で語られたリアルな声</a:t>
             </a:r>
           </a:p>
         </p:txBody>
@@ -4500,8 +4500,8 @@
         </p:nvSpPr>
         <p:spPr>
           <a:xfrm>
-            <a:off x="320040" y="6720000"/>
-            <a:ext cx="3474720" cy="14977"/>
+            <a:off x="365760" y="6720000"/>
+            <a:ext cx="3383280" cy="16047"/>
           </a:xfrm>
           <a:prstGeom prst="rect">
             <a:avLst/>
@@ -4537,7 +4537,7 @@
             <a:r>
               <a:rPr sz="900" b="0">
                 <a:solidFill>
-                  <a:srgbClr val="C9A02D"/>
+                  <a:srgbClr val="B8942F"/>
                 </a:solidFill>
                 <a:latin typeface="Hiragino Sans"/>
               </a:rPr>
@@ -4560,7 +4560,7 @@
     <p:bg>
       <p:bgPr>
         <a:solidFill>
-          <a:srgbClr val="12100E"/>
+          <a:srgbClr val="FAF8F5"/>
         </a:solidFill>
         <a:effectLst/>
       </p:bgPr>
@@ -4580,8 +4580,8 @@
         </p:nvSpPr>
         <p:spPr>
           <a:xfrm>
-            <a:off x="320040" y="548640"/>
-            <a:ext cx="3474720" cy="59911"/>
+            <a:off x="365760" y="457200"/>
+            <a:ext cx="3383280" cy="64190"/>
           </a:xfrm>
           <a:prstGeom prst="rect">
             <a:avLst/>
@@ -4617,7 +4617,7 @@
             <a:r>
               <a:rPr sz="1800" b="0">
                 <a:solidFill>
-                  <a:srgbClr val="78716C"/>
+                  <a:srgbClr val="5D4E3F"/>
                 </a:solidFill>
                 <a:latin typeface="Hiragino Sans"/>
               </a:rPr>
@@ -4633,7 +4633,7 @@
             <a:r>
               <a:rPr sz="1800" b="0">
                 <a:solidFill>
-                  <a:srgbClr val="78716C"/>
+                  <a:srgbClr val="5D4E3F"/>
                 </a:solidFill>
                 <a:latin typeface="Hiragino Sans"/>
               </a:rPr>
@@ -4650,14 +4650,14 @@
         </p:nvSpPr>
         <p:spPr>
           <a:xfrm>
-            <a:off x="320040" y="1143000"/>
+            <a:off x="365760" y="1143000"/>
             <a:ext cx="914400" cy="13716"/>
           </a:xfrm>
           <a:prstGeom prst="rect">
             <a:avLst/>
           </a:prstGeom>
           <a:solidFill>
-            <a:srgbClr val="C9A02D"/>
+            <a:srgbClr val="B8942F"/>
           </a:solidFill>
           <a:ln>
             <a:noFill/>
@@ -4693,8 +4693,8 @@
         </p:nvSpPr>
         <p:spPr>
           <a:xfrm>
-            <a:off x="320040" y="1371600"/>
-            <a:ext cx="3474720" cy="53254"/>
+            <a:off x="365760" y="1371600"/>
+            <a:ext cx="3383280" cy="57058"/>
           </a:xfrm>
           <a:prstGeom prst="rect">
             <a:avLst/>
@@ -4730,7 +4730,7 @@
             <a:r>
               <a:rPr sz="3200" b="1">
                 <a:solidFill>
-                  <a:srgbClr val="E84D3D"/>
+                  <a:srgbClr val="B5453A"/>
                 </a:solidFill>
                 <a:latin typeface="Hiragino Sans"/>
               </a:rPr>
@@ -4747,8 +4747,8 @@
         </p:nvSpPr>
         <p:spPr>
           <a:xfrm>
-            <a:off x="320040" y="1791600"/>
-            <a:ext cx="3474720" cy="21634"/>
+            <a:off x="365760" y="1801600"/>
+            <a:ext cx="3383280" cy="21396"/>
           </a:xfrm>
           <a:prstGeom prst="rect">
             <a:avLst/>
@@ -4782,9 +4782,9 @@
               </a:lnSpc>
             </a:pPr>
             <a:r>
-              <a:rPr sz="1300" b="0">
-                <a:solidFill>
-                  <a:srgbClr val="78716C"/>
+              <a:rPr sz="1200" b="0">
+                <a:solidFill>
+                  <a:srgbClr val="7A6652"/>
                 </a:solidFill>
                 <a:latin typeface="Hiragino Sans"/>
               </a:rPr>
@@ -4801,8 +4801,8 @@
         </p:nvSpPr>
         <p:spPr>
           <a:xfrm>
-            <a:off x="320040" y="2286000"/>
-            <a:ext cx="3474720" cy="53254"/>
+            <a:off x="365760" y="2286000"/>
+            <a:ext cx="3383280" cy="57058"/>
           </a:xfrm>
           <a:prstGeom prst="rect">
             <a:avLst/>
@@ -4838,7 +4838,7 @@
             <a:r>
               <a:rPr sz="3200" b="1">
                 <a:solidFill>
-                  <a:srgbClr val="FFB300"/>
+                  <a:srgbClr val="C17817"/>
                 </a:solidFill>
                 <a:latin typeface="Hiragino Sans"/>
               </a:rPr>
@@ -4855,8 +4855,8 @@
         </p:nvSpPr>
         <p:spPr>
           <a:xfrm>
-            <a:off x="320040" y="2706000"/>
-            <a:ext cx="3474720" cy="21634"/>
+            <a:off x="365760" y="2716000"/>
+            <a:ext cx="3383280" cy="21396"/>
           </a:xfrm>
           <a:prstGeom prst="rect">
             <a:avLst/>
@@ -4890,9 +4890,9 @@
               </a:lnSpc>
             </a:pPr>
             <a:r>
-              <a:rPr sz="1300" b="0">
-                <a:solidFill>
-                  <a:srgbClr val="78716C"/>
+              <a:rPr sz="1200" b="0">
+                <a:solidFill>
+                  <a:srgbClr val="7A6652"/>
                 </a:solidFill>
                 <a:latin typeface="Hiragino Sans"/>
               </a:rPr>
@@ -4909,8 +4909,8 @@
         </p:nvSpPr>
         <p:spPr>
           <a:xfrm>
-            <a:off x="320040" y="3200400"/>
-            <a:ext cx="3474720" cy="53254"/>
+            <a:off x="365760" y="3200400"/>
+            <a:ext cx="3383280" cy="57058"/>
           </a:xfrm>
           <a:prstGeom prst="rect">
             <a:avLst/>
@@ -4946,7 +4946,7 @@
             <a:r>
               <a:rPr sz="3200" b="1">
                 <a:solidFill>
-                  <a:srgbClr val="BB86FC"/>
+                  <a:srgbClr val="1B3A5C"/>
                 </a:solidFill>
                 <a:latin typeface="Hiragino Sans"/>
               </a:rPr>
@@ -4963,8 +4963,8 @@
         </p:nvSpPr>
         <p:spPr>
           <a:xfrm>
-            <a:off x="320040" y="3620400"/>
-            <a:ext cx="3474720" cy="21634"/>
+            <a:off x="365760" y="3630400"/>
+            <a:ext cx="3383280" cy="21396"/>
           </a:xfrm>
           <a:prstGeom prst="rect">
             <a:avLst/>
@@ -4998,9 +4998,9 @@
               </a:lnSpc>
             </a:pPr>
             <a:r>
-              <a:rPr sz="1300" b="0">
-                <a:solidFill>
-                  <a:srgbClr val="78716C"/>
+              <a:rPr sz="1200" b="0">
+                <a:solidFill>
+                  <a:srgbClr val="7A6652"/>
                 </a:solidFill>
                 <a:latin typeface="Hiragino Sans"/>
               </a:rPr>
@@ -5017,14 +5017,14 @@
         </p:nvSpPr>
         <p:spPr>
           <a:xfrm>
-            <a:off x="320040" y="4343400"/>
+            <a:off x="365760" y="4343400"/>
             <a:ext cx="914400" cy="13716"/>
           </a:xfrm>
           <a:prstGeom prst="rect">
             <a:avLst/>
           </a:prstGeom>
           <a:solidFill>
-            <a:srgbClr val="C9A02D"/>
+            <a:srgbClr val="B8942F"/>
           </a:solidFill>
           <a:ln>
             <a:noFill/>
@@ -5060,8 +5060,8 @@
         </p:nvSpPr>
         <p:spPr>
           <a:xfrm>
-            <a:off x="320040" y="4571040"/>
-            <a:ext cx="3474720" cy="92171"/>
+            <a:off x="365760" y="4571040"/>
+            <a:ext cx="3383280" cy="90525"/>
           </a:xfrm>
           <a:prstGeom prst="rect">
             <a:avLst/>
@@ -5095,9 +5095,9 @@
               </a:lnSpc>
             </a:pPr>
             <a:r>
-              <a:rPr sz="1200" b="0">
-                <a:solidFill>
-                  <a:srgbClr val="78716C"/>
+              <a:rPr sz="1100" b="0">
+                <a:solidFill>
+                  <a:srgbClr val="7A6652"/>
                 </a:solidFill>
                 <a:latin typeface="Hiragino Sans"/>
               </a:rPr>
@@ -5111,9 +5111,9 @@
               </a:lnSpc>
             </a:pPr>
             <a:r>
-              <a:rPr sz="1200" b="0">
-                <a:solidFill>
-                  <a:srgbClr val="78716C"/>
+              <a:rPr sz="1100" b="0">
+                <a:solidFill>
+                  <a:srgbClr val="7A6652"/>
                 </a:solidFill>
                 <a:latin typeface="Hiragino Sans"/>
               </a:rPr>
@@ -5127,9 +5127,9 @@
               </a:lnSpc>
             </a:pPr>
             <a:r>
-              <a:rPr sz="1200" b="0">
-                <a:solidFill>
-                  <a:srgbClr val="78716C"/>
+              <a:rPr sz="1100" b="0">
+                <a:solidFill>
+                  <a:srgbClr val="7A6652"/>
                 </a:solidFill>
                 <a:latin typeface="Hiragino Sans"/>
               </a:rPr>
@@ -5143,9 +5143,9 @@
               </a:lnSpc>
             </a:pPr>
             <a:r>
-              <a:rPr sz="1200" b="0">
-                <a:solidFill>
-                  <a:srgbClr val="78716C"/>
+              <a:rPr sz="1100" b="0">
+                <a:solidFill>
+                  <a:srgbClr val="7A6652"/>
                 </a:solidFill>
                 <a:latin typeface="Hiragino Sans"/>
               </a:rPr>
@@ -5162,8 +5162,8 @@
         </p:nvSpPr>
         <p:spPr>
           <a:xfrm>
-            <a:off x="320040" y="6720000"/>
-            <a:ext cx="3474720" cy="14977"/>
+            <a:off x="365760" y="6720000"/>
+            <a:ext cx="3383280" cy="16047"/>
           </a:xfrm>
           <a:prstGeom prst="rect">
             <a:avLst/>
@@ -5199,7 +5199,7 @@
             <a:r>
               <a:rPr sz="900" b="0">
                 <a:solidFill>
-                  <a:srgbClr val="C9A02D"/>
+                  <a:srgbClr val="B8942F"/>
                 </a:solidFill>
                 <a:latin typeface="Hiragino Sans"/>
               </a:rPr>
@@ -5222,7 +5222,7 @@
     <p:bg>
       <p:bgPr>
         <a:solidFill>
-          <a:srgbClr val="12100E"/>
+          <a:srgbClr val="FAF8F5"/>
         </a:solidFill>
         <a:effectLst/>
       </p:bgPr>
@@ -5242,8 +5242,8 @@
         </p:nvSpPr>
         <p:spPr>
           <a:xfrm>
-            <a:off x="320040" y="1600200"/>
-            <a:ext cx="3474720" cy="149778"/>
+            <a:off x="365760" y="1600200"/>
+            <a:ext cx="3383280" cy="160477"/>
           </a:xfrm>
           <a:prstGeom prst="rect">
             <a:avLst/>
@@ -5279,7 +5279,7 @@
             <a:r>
               <a:rPr sz="3000" b="1">
                 <a:solidFill>
-                  <a:srgbClr val="F5F0EB"/>
+                  <a:srgbClr val="1C1917"/>
                 </a:solidFill>
                 <a:latin typeface="Hiragino Sans"/>
               </a:rPr>
@@ -5295,7 +5295,7 @@
             <a:r>
               <a:rPr sz="3000" b="1">
                 <a:solidFill>
-                  <a:srgbClr val="F5F0EB"/>
+                  <a:srgbClr val="1C1917"/>
                 </a:solidFill>
                 <a:latin typeface="Hiragino Sans"/>
               </a:rPr>
@@ -5311,7 +5311,7 @@
             <a:r>
               <a:rPr sz="3000" b="1">
                 <a:solidFill>
-                  <a:srgbClr val="F5F0EB"/>
+                  <a:srgbClr val="1C1917"/>
                 </a:solidFill>
                 <a:latin typeface="Hiragino Sans"/>
               </a:rPr>
@@ -5328,8 +5328,8 @@
         </p:nvSpPr>
         <p:spPr>
           <a:xfrm>
-            <a:off x="320040" y="3429000"/>
-            <a:ext cx="3474720" cy="99852"/>
+            <a:off x="365760" y="3429000"/>
+            <a:ext cx="3383280" cy="106984"/>
           </a:xfrm>
           <a:prstGeom prst="rect">
             <a:avLst/>
@@ -5365,7 +5365,7 @@
             <a:r>
               <a:rPr sz="3000" b="1">
                 <a:solidFill>
-                  <a:srgbClr val="C9A02D"/>
+                  <a:srgbClr val="B8942F"/>
                 </a:solidFill>
                 <a:latin typeface="Hiragino Sans"/>
               </a:rPr>
@@ -5381,7 +5381,7 @@
             <a:r>
               <a:rPr sz="3000" b="1">
                 <a:solidFill>
-                  <a:srgbClr val="C9A02D"/>
+                  <a:srgbClr val="B8942F"/>
                 </a:solidFill>
                 <a:latin typeface="Hiragino Sans"/>
               </a:rPr>
@@ -5398,8 +5398,8 @@
         </p:nvSpPr>
         <p:spPr>
           <a:xfrm>
-            <a:off x="320040" y="6172200"/>
-            <a:ext cx="3474720" cy="13313"/>
+            <a:off x="365760" y="6400000"/>
+            <a:ext cx="3383280" cy="12481"/>
           </a:xfrm>
           <a:prstGeom prst="rect">
             <a:avLst/>
@@ -5433,9 +5433,9 @@
               </a:lnSpc>
             </a:pPr>
             <a:r>
-              <a:rPr sz="800" b="0">
-                <a:solidFill>
-                  <a:srgbClr val="4A4540"/>
+              <a:rPr sz="700" b="0">
+                <a:solidFill>
+                  <a:srgbClr val="BFAD9C"/>
                 </a:solidFill>
                 <a:latin typeface="Hiragino Sans"/>
               </a:rPr>
@@ -5452,8 +5452,8 @@
         </p:nvSpPr>
         <p:spPr>
           <a:xfrm>
-            <a:off x="320040" y="6720000"/>
-            <a:ext cx="3474720" cy="14977"/>
+            <a:off x="365760" y="6720000"/>
+            <a:ext cx="3383280" cy="16047"/>
           </a:xfrm>
           <a:prstGeom prst="rect">
             <a:avLst/>
@@ -5489,7 +5489,7 @@
             <a:r>
               <a:rPr sz="900" b="0">
                 <a:solidFill>
-                  <a:srgbClr val="C9A02D"/>
+                  <a:srgbClr val="B8942F"/>
                 </a:solidFill>
                 <a:latin typeface="Hiragino Sans"/>
               </a:rPr>
